--- a/mkt1107/output/MKT1107_W06_slides.pptx
+++ b/mkt1107/output/MKT1107_W06_slides.pptx
@@ -59,10 +59,9 @@
     <p:sldId id="307" r:id="rId53"/>
     <p:sldId id="308" r:id="rId54"/>
     <p:sldId id="309" r:id="rId55"/>
-    <p:sldId id="310" r:id="rId56"/>
   </p:sldIdLst>
   <p:notesMasterIdLst>
-    <p:notesMasterId r:id="rId57"/>
+    <p:notesMasterId r:id="rId56"/>
   </p:notesMasterIdLst>
   <p:sldSz cx="12192000" cy="6858000"/>
   <p:notesSz cx="6858000" cy="12192000"/>
@@ -161,19 +160,19 @@
   <p:extLst>
     <p:ext uri="{521415D9-36F7-43E2-AB2F-B90AF26B5E84}">
       <p14:sectionLst xmlns:p14="http://schemas.microsoft.com/office/powerpoint/2010/main">
-        <p14:section name="Mở đầu" id="{46efdacb-3e55-fcd4-eb77-dc93c59bd32e}">
+        <p14:section name="Mở đầu" id="{fafa4045-0e9d-4eef-5ec0-296b8e6e282f}">
           <p14:sldIdLst>
             <p14:sldId id="256"/>
           </p14:sldIdLst>
         </p14:section>
-        <p14:section name="S1 · Khởi động: in 1.000 phiếu rồi mới thấy câu hỏi sai" id="{5f6ad9a5-af80-6633-baca-60519347d9c0}">
+        <p14:section name="S1 · Khởi động: in 1.000 phiếu rồi mới thấy câu hỏi sai" id="{e02cffb4-1cd1-8892-27b5-524d2c1a5875}">
           <p14:sldIdLst>
             <p14:sldId id="257"/>
             <p14:sldId id="258"/>
             <p14:sldId id="259"/>
           </p14:sldIdLst>
         </p14:section>
-        <p14:section name="S2 · 4.1 Một số khái niệm trong nghiên cứu" id="{a3bf32a8-705d-0cd9-82dc-d41883f90f4b}">
+        <p14:section name="S2 · 4.1 Một số khái niệm trong nghiên cứu" id="{65319d6c-8b97-382f-178c-046969e8dbc1}">
           <p14:sldIdLst>
             <p14:sldId id="260"/>
             <p14:sldId id="261"/>
@@ -191,7 +190,7 @@
             <p14:sldId id="273"/>
           </p14:sldIdLst>
         </p14:section>
-        <p14:section name="S3 · Chọn thiết kế: khám phá, mô tả hay nhân quả?" id="{bb68d526-2b99-5491-677f-19ecf5e5e63b}">
+        <p14:section name="S3 · Chọn thiết kế: khám phá, mô tả hay nhân quả?" id="{33e59f0b-7dfd-782a-73c1-88ec6529bfaf}">
           <p14:sldIdLst>
             <p14:sldId id="274"/>
             <p14:sldId id="275"/>
@@ -205,7 +204,7 @@
             <p14:sldId id="283"/>
           </p14:sldIdLst>
         </p14:section>
-        <p14:section name="S4 · 4.2 Vấn đề nghiên cứu" id="{3ff82da3-a390-f992-0d6a-625a4f82bade}">
+        <p14:section name="S4 · 4.2 Vấn đề nghiên cứu" id="{28b97ebc-ac7f-4839-68eb-859f1e31c18b}">
           <p14:sldIdLst>
             <p14:sldId id="284"/>
             <p14:sldId id="285"/>
@@ -219,7 +218,7 @@
             <p14:sldId id="293"/>
           </p14:sldIdLst>
         </p14:section>
-        <p14:section name="S5 · 4.3 Đề cương nghiên cứu marketing" id="{8a870bbe-b079-900f-31d2-ecb755591103}">
+        <p14:section name="S5 · 4.3 Đề cương nghiên cứu marketing" id="{e17ab312-a77c-9d40-f365-4c107955c55a}">
           <p14:sldIdLst>
             <p14:sldId id="294"/>
             <p14:sldId id="295"/>
@@ -233,19 +232,18 @@
             <p14:sldId id="303"/>
           </p14:sldIdLst>
         </p14:section>
-        <p14:section name="S6 · Thực hành nhóm: từ vấn đề đến đề cương" id="{4e7f8313-7e2f-3785-504e-588835a9269f}">
+        <p14:section name="S6 · Thực hành nhóm: từ vấn đề đến đề cương" id="{d21d9d21-773a-40a7-676f-edc0c5f4425f}">
           <p14:sldIdLst>
             <p14:sldId id="304"/>
             <p14:sldId id="305"/>
           </p14:sldIdLst>
         </p14:section>
-        <p14:section name="S7 · Kết buổi" id="{d52e709e-439f-9881-5169-41ad0fbf278e}">
+        <p14:section name="S7 · Kết buổi" id="{ac5d33f8-67b0-e26a-482d-30387fa064b9}">
           <p14:sldIdLst>
             <p14:sldId id="306"/>
             <p14:sldId id="307"/>
             <p14:sldId id="308"/>
             <p14:sldId id="309"/>
-            <p14:sldId id="310"/>
           </p14:sldIdLst>
         </p14:section>
       </p14:sectionLst>
@@ -5114,94 +5112,6 @@
             <a:fld id="{F7021451-1387-4CA6-816F-3879F97B5CBC}" type="slidenum">
               <a:rPr lang="en-US"/>
               <a:t>54</a:t>
-            </a:fld>
-            <a:endParaRPr lang="en-US"/>
-          </a:p>
-        </p:txBody>
-      </p:sp>
-    </p:spTree>
-    <p:extLst>
-      <p:ext uri="{BB962C8B-B14F-4D97-AF65-F5344CB8AC3E}">
-        <p14:creationId xmlns:p14="http://schemas.microsoft.com/office/powerpoint/2010/main" val="1024086991"/>
-      </p:ext>
-    </p:extLst>
-  </p:cSld>
-  <p:clrMapOvr>
-    <a:masterClrMapping/>
-  </p:clrMapOvr>
-</p:notes>
-</file>
-
-<file path=ppt/notesSlides/notesSlide55.xml><?xml version="1.0" encoding="utf-8"?>
-<p:notes xmlns:a="http://schemas.openxmlformats.org/drawingml/2006/main" xmlns:r="http://schemas.openxmlformats.org/officeDocument/2006/relationships" xmlns:p="http://schemas.openxmlformats.org/presentationml/2006/main">
-  <p:cSld>
-    <p:spTree>
-      <p:nvGrpSpPr>
-        <p:cNvPr id="1" name=""/>
-        <p:cNvGrpSpPr/>
-        <p:nvPr/>
-      </p:nvGrpSpPr>
-      <p:grpSpPr>
-        <a:xfrm>
-          <a:off x="0" y="0"/>
-          <a:ext cx="0" cy="0"/>
-          <a:chOff x="0" y="0"/>
-          <a:chExt cx="0" cy="0"/>
-        </a:xfrm>
-      </p:grpSpPr>
-      <p:sp>
-        <p:nvSpPr>
-          <p:cNvPr id="2" name="Slide Image Placeholder 1"/>
-          <p:cNvSpPr>
-            <a:spLocks noGrp="1" noRot="1" noChangeAspect="1"/>
-          </p:cNvSpPr>
-          <p:nvPr>
-            <p:ph type="sldImg"/>
-          </p:nvPr>
-        </p:nvSpPr>
-        <p:spPr/>
-      </p:sp>
-      <p:sp>
-        <p:nvSpPr>
-          <p:cNvPr id="3" name="Notes Placeholder 2"/>
-          <p:cNvSpPr>
-            <a:spLocks noGrp="1"/>
-          </p:cNvSpPr>
-          <p:nvPr>
-            <p:ph type="body" idx="1"/>
-          </p:nvPr>
-        </p:nvSpPr>
-        <p:spPr/>
-        <p:txBody>
-          <a:bodyPr/>
-          <a:lstStyle/>
-          <a:p>
-            <a:r>
-              <a:rPr lang="en-US" dirty="0"/>
-              <a:t>Tiếp danh mục tài liệu tham khảo.</a:t>
-            </a:r>
-            <a:endParaRPr lang="en-US" dirty="0"/>
-          </a:p>
-        </p:txBody>
-      </p:sp>
-      <p:sp>
-        <p:nvSpPr>
-          <p:cNvPr id="4" name="Slide Number Placeholder 3"/>
-          <p:cNvSpPr>
-            <a:spLocks noGrp="1"/>
-          </p:cNvSpPr>
-          <p:nvPr>
-            <p:ph type="sldNum" sz="quarter" idx="10"/>
-          </p:nvPr>
-        </p:nvSpPr>
-        <p:spPr/>
-        <p:txBody>
-          <a:bodyPr/>
-          <a:lstStyle/>
-          <a:p>
-            <a:fld id="{F7021451-1387-4CA6-816F-3879F97B5CBC}" type="slidenum">
-              <a:rPr lang="en-US"/>
-              <a:t>55</a:t>
             </a:fld>
             <a:endParaRPr lang="en-US"/>
           </a:p>
@@ -6817,9 +6727,9 @@
             <a:tbl>
               <a:tblPr/>
               <a:tblGrid>
-                <a:gridCol w="3688080"/>
-                <a:gridCol w="3688080"/>
-                <a:gridCol w="3688080"/>
+                <a:gridCol w="3298301"/>
+                <a:gridCol w="4590033"/>
+                <a:gridCol w="3175906"/>
               </a:tblGrid>
               <a:tr h="524256">
                 <a:tc>
@@ -7036,7 +6946,7 @@
                   </a:tcPr>
                 </a:tc>
               </a:tr>
-              <a:tr h="920496">
+              <a:tr h="524256">
                 <a:tc>
                   <a:txBody>
                     <a:bodyPr/>
@@ -7693,7 +7603,7 @@
         </p:nvSpPr>
         <p:spPr>
           <a:xfrm>
-            <a:off x="548640" y="4642104"/>
+            <a:off x="548640" y="4383024"/>
             <a:ext cx="11064240" cy="685800"/>
           </a:xfrm>
           <a:prstGeom prst="roundRect">
@@ -7715,7 +7625,7 @@
         </p:nvSpPr>
         <p:spPr>
           <a:xfrm>
-            <a:off x="731520" y="4756404"/>
+            <a:off x="731520" y="4497324"/>
             <a:ext cx="457200" cy="457200"/>
           </a:xfrm>
           <a:prstGeom prst="ellipse">
@@ -7735,7 +7645,7 @@
         </p:nvSpPr>
         <p:spPr>
           <a:xfrm>
-            <a:off x="731520" y="4756404"/>
+            <a:off x="731520" y="4497324"/>
             <a:ext cx="457200" cy="457200"/>
           </a:xfrm>
           <a:prstGeom prst="rect">
@@ -7774,7 +7684,7 @@
         </p:nvSpPr>
         <p:spPr>
           <a:xfrm>
-            <a:off x="1325880" y="4642104"/>
+            <a:off x="1325880" y="4383024"/>
             <a:ext cx="10149840" cy="685800"/>
           </a:xfrm>
           <a:prstGeom prst="rect">
@@ -8005,9 +7915,9 @@
             <a:tbl>
               <a:tblPr/>
               <a:tblGrid>
-                <a:gridCol w="3688080"/>
-                <a:gridCol w="3688080"/>
-                <a:gridCol w="3688080"/>
+                <a:gridCol w="3288171"/>
+                <a:gridCol w="4416832"/>
+                <a:gridCol w="3359237"/>
               </a:tblGrid>
               <a:tr h="524256">
                 <a:tc>
@@ -8643,7 +8553,7 @@
                   </a:tcPr>
                 </a:tc>
               </a:tr>
-              <a:tr h="920496">
+              <a:tr h="524256">
                 <a:tc>
                   <a:txBody>
                     <a:bodyPr/>
@@ -9085,7 +8995,7 @@
         </p:nvSpPr>
         <p:spPr>
           <a:xfrm>
-            <a:off x="548640" y="5166360"/>
+            <a:off x="548640" y="4907280"/>
             <a:ext cx="11064240" cy="685800"/>
           </a:xfrm>
           <a:prstGeom prst="roundRect">
@@ -9107,7 +9017,7 @@
         </p:nvSpPr>
         <p:spPr>
           <a:xfrm>
-            <a:off x="731520" y="5280660"/>
+            <a:off x="731520" y="5021580"/>
             <a:ext cx="457200" cy="457200"/>
           </a:xfrm>
           <a:prstGeom prst="ellipse">
@@ -9127,7 +9037,7 @@
         </p:nvSpPr>
         <p:spPr>
           <a:xfrm>
-            <a:off x="731520" y="5280660"/>
+            <a:off x="731520" y="5021580"/>
             <a:ext cx="457200" cy="457200"/>
           </a:xfrm>
           <a:prstGeom prst="rect">
@@ -9166,7 +9076,7 @@
         </p:nvSpPr>
         <p:spPr>
           <a:xfrm>
-            <a:off x="1325880" y="5166360"/>
+            <a:off x="1325880" y="4907280"/>
             <a:ext cx="10149840" cy="685800"/>
           </a:xfrm>
           <a:prstGeom prst="rect">
@@ -9397,9 +9307,9 @@
             <a:tbl>
               <a:tblPr/>
               <a:tblGrid>
-                <a:gridCol w="3688080"/>
-                <a:gridCol w="3688080"/>
-                <a:gridCol w="3688080"/>
+                <a:gridCol w="2719757"/>
+                <a:gridCol w="4061574"/>
+                <a:gridCol w="4282909"/>
               </a:tblGrid>
               <a:tr h="524256">
                 <a:tc>
@@ -9616,7 +9526,7 @@
                   </a:tcPr>
                 </a:tc>
               </a:tr>
-              <a:tr h="920496">
+              <a:tr h="524256">
                 <a:tc>
                   <a:txBody>
                     <a:bodyPr/>
@@ -10273,7 +10183,7 @@
         </p:nvSpPr>
         <p:spPr>
           <a:xfrm>
-            <a:off x="548640" y="4642104"/>
+            <a:off x="548640" y="4383024"/>
             <a:ext cx="11064240" cy="685800"/>
           </a:xfrm>
           <a:prstGeom prst="roundRect">
@@ -10295,7 +10205,7 @@
         </p:nvSpPr>
         <p:spPr>
           <a:xfrm>
-            <a:off x="731520" y="4756404"/>
+            <a:off x="731520" y="4497324"/>
             <a:ext cx="457200" cy="457200"/>
           </a:xfrm>
           <a:prstGeom prst="ellipse">
@@ -10315,7 +10225,7 @@
         </p:nvSpPr>
         <p:spPr>
           <a:xfrm>
-            <a:off x="731520" y="4756404"/>
+            <a:off x="731520" y="4497324"/>
             <a:ext cx="457200" cy="457200"/>
           </a:xfrm>
           <a:prstGeom prst="rect">
@@ -10354,7 +10264,7 @@
         </p:nvSpPr>
         <p:spPr>
           <a:xfrm>
-            <a:off x="1325880" y="4642104"/>
+            <a:off x="1325880" y="4383024"/>
             <a:ext cx="10149840" cy="685800"/>
           </a:xfrm>
           <a:prstGeom prst="rect">
@@ -18944,8 +18854,8 @@
             <a:tbl>
               <a:tblPr/>
               <a:tblGrid>
-                <a:gridCol w="5532120"/>
-                <a:gridCol w="5532120"/>
+                <a:gridCol w="3251947"/>
+                <a:gridCol w="7812293"/>
               </a:tblGrid>
               <a:tr h="524256">
                 <a:tc>
@@ -19235,7 +19145,7 @@
                   </a:tcPr>
                 </a:tc>
               </a:tr>
-              <a:tr h="920496">
+              <a:tr h="524256">
                 <a:tc>
                   <a:txBody>
                     <a:bodyPr/>
@@ -20222,7 +20132,7 @@
         <p:spPr>
           <a:xfrm>
             <a:off x="5943600" y="3566160"/>
-            <a:ext cx="5303520" cy="1463040"/>
+            <a:ext cx="4297680" cy="2011680"/>
           </a:xfrm>
           <a:prstGeom prst="rect">
             <a:avLst/>
@@ -21560,9 +21470,9 @@
             <a:tbl>
               <a:tblPr/>
               <a:tblGrid>
-                <a:gridCol w="3688080"/>
-                <a:gridCol w="3688080"/>
-                <a:gridCol w="3688080"/>
+                <a:gridCol w="2980162"/>
+                <a:gridCol w="3318535"/>
+                <a:gridCol w="4765543"/>
               </a:tblGrid>
               <a:tr h="524256">
                 <a:tc>
@@ -22413,7 +22323,7 @@
                   </a:tcPr>
                 </a:tc>
               </a:tr>
-              <a:tr h="920496">
+              <a:tr h="524256">
                 <a:tc>
                   <a:txBody>
                     <a:bodyPr/>
@@ -22640,7 +22550,7 @@
         </p:nvSpPr>
         <p:spPr>
           <a:xfrm>
-            <a:off x="548640" y="5166360"/>
+            <a:off x="548640" y="4907280"/>
             <a:ext cx="11064240" cy="685800"/>
           </a:xfrm>
           <a:prstGeom prst="roundRect">
@@ -22662,7 +22572,7 @@
         </p:nvSpPr>
         <p:spPr>
           <a:xfrm>
-            <a:off x="731520" y="5280660"/>
+            <a:off x="731520" y="5021580"/>
             <a:ext cx="457200" cy="457200"/>
           </a:xfrm>
           <a:prstGeom prst="ellipse">
@@ -22682,7 +22592,7 @@
         </p:nvSpPr>
         <p:spPr>
           <a:xfrm>
-            <a:off x="731520" y="5280660"/>
+            <a:off x="731520" y="5021580"/>
             <a:ext cx="457200" cy="457200"/>
           </a:xfrm>
           <a:prstGeom prst="rect">
@@ -22721,7 +22631,7 @@
         </p:nvSpPr>
         <p:spPr>
           <a:xfrm>
-            <a:off x="1325880" y="5166360"/>
+            <a:off x="1325880" y="4907280"/>
             <a:ext cx="10149840" cy="685800"/>
           </a:xfrm>
           <a:prstGeom prst="rect">
@@ -22952,8 +22862,8 @@
             <a:tbl>
               <a:tblPr/>
               <a:tblGrid>
-                <a:gridCol w="5532120"/>
-                <a:gridCol w="5532120"/>
+                <a:gridCol w="5659624"/>
+                <a:gridCol w="5404616"/>
               </a:tblGrid>
               <a:tr h="524256">
                 <a:tc>
@@ -23099,7 +23009,7 @@
                   </a:tcPr>
                 </a:tc>
               </a:tr>
-              <a:tr h="920496">
+              <a:tr h="524256">
                 <a:tc>
                   <a:txBody>
                     <a:bodyPr/>
@@ -31193,8 +31103,8 @@
             <a:tbl>
               <a:tblPr/>
               <a:tblGrid>
-                <a:gridCol w="5532120"/>
-                <a:gridCol w="5532120"/>
+                <a:gridCol w="5278759"/>
+                <a:gridCol w="5785481"/>
               </a:tblGrid>
               <a:tr h="524256">
                 <a:tc>
@@ -31928,7 +31838,7 @@
         </p:nvSpPr>
         <p:spPr>
           <a:xfrm>
-            <a:off x="548640" y="4770120"/>
+            <a:off x="548640" y="4907280"/>
             <a:ext cx="11064240" cy="1102360"/>
           </a:xfrm>
           <a:prstGeom prst="roundRect">
@@ -31950,7 +31860,7 @@
         </p:nvSpPr>
         <p:spPr>
           <a:xfrm>
-            <a:off x="731520" y="5092700"/>
+            <a:off x="731520" y="5229860"/>
             <a:ext cx="457200" cy="457200"/>
           </a:xfrm>
           <a:prstGeom prst="ellipse">
@@ -31970,7 +31880,7 @@
         </p:nvSpPr>
         <p:spPr>
           <a:xfrm>
-            <a:off x="731520" y="5092700"/>
+            <a:off x="731520" y="5229860"/>
             <a:ext cx="457200" cy="457200"/>
           </a:xfrm>
           <a:prstGeom prst="rect">
@@ -32009,7 +31919,7 @@
         </p:nvSpPr>
         <p:spPr>
           <a:xfrm>
-            <a:off x="1325880" y="4770120"/>
+            <a:off x="1325880" y="4907280"/>
             <a:ext cx="10149840" cy="1102360"/>
           </a:xfrm>
           <a:prstGeom prst="rect">
@@ -32867,9 +32777,9 @@
             <a:tbl>
               <a:tblPr/>
               <a:tblGrid>
-                <a:gridCol w="3688080"/>
-                <a:gridCol w="3688080"/>
-                <a:gridCol w="3688080"/>
+                <a:gridCol w="2868384"/>
+                <a:gridCol w="3378622"/>
+                <a:gridCol w="4817234"/>
               </a:tblGrid>
               <a:tr h="524256">
                 <a:tc>
@@ -33301,7 +33211,7 @@
                   </a:tcPr>
                 </a:tc>
               </a:tr>
-              <a:tr h="920496">
+              <a:tr h="524256">
                 <a:tc>
                   <a:txBody>
                     <a:bodyPr/>
@@ -33958,7 +33868,7 @@
         </p:nvSpPr>
         <p:spPr>
           <a:xfrm>
-            <a:off x="548640" y="5166360"/>
+            <a:off x="548640" y="4907280"/>
             <a:ext cx="11064240" cy="685800"/>
           </a:xfrm>
           <a:prstGeom prst="roundRect">
@@ -33980,7 +33890,7 @@
         </p:nvSpPr>
         <p:spPr>
           <a:xfrm>
-            <a:off x="731520" y="5280660"/>
+            <a:off x="731520" y="5021580"/>
             <a:ext cx="457200" cy="457200"/>
           </a:xfrm>
           <a:prstGeom prst="ellipse">
@@ -34000,7 +33910,7 @@
         </p:nvSpPr>
         <p:spPr>
           <a:xfrm>
-            <a:off x="731520" y="5280660"/>
+            <a:off x="731520" y="5021580"/>
             <a:ext cx="457200" cy="457200"/>
           </a:xfrm>
           <a:prstGeom prst="rect">
@@ -34039,7 +33949,7 @@
         </p:nvSpPr>
         <p:spPr>
           <a:xfrm>
-            <a:off x="1325880" y="5166360"/>
+            <a:off x="1325880" y="4907280"/>
             <a:ext cx="10149840" cy="685800"/>
           </a:xfrm>
           <a:prstGeom prst="rect">
@@ -34270,8 +34180,8 @@
             <a:tbl>
               <a:tblPr/>
               <a:tblGrid>
-                <a:gridCol w="5532120"/>
-                <a:gridCol w="5532120"/>
+                <a:gridCol w="3487374"/>
+                <a:gridCol w="7576866"/>
               </a:tblGrid>
               <a:tr h="524256">
                 <a:tc>
@@ -35149,7 +35059,7 @@
         </p:nvSpPr>
         <p:spPr>
           <a:xfrm>
-            <a:off x="548640" y="5294376"/>
+            <a:off x="548640" y="5394960"/>
             <a:ext cx="11064240" cy="685800"/>
           </a:xfrm>
           <a:prstGeom prst="roundRect">
@@ -35171,7 +35081,7 @@
         </p:nvSpPr>
         <p:spPr>
           <a:xfrm>
-            <a:off x="731520" y="5408676"/>
+            <a:off x="731520" y="5509260"/>
             <a:ext cx="457200" cy="457200"/>
           </a:xfrm>
           <a:prstGeom prst="ellipse">
@@ -35191,7 +35101,7 @@
         </p:nvSpPr>
         <p:spPr>
           <a:xfrm>
-            <a:off x="731520" y="5408676"/>
+            <a:off x="731520" y="5509260"/>
             <a:ext cx="457200" cy="457200"/>
           </a:xfrm>
           <a:prstGeom prst="rect">
@@ -35230,7 +35140,7 @@
         </p:nvSpPr>
         <p:spPr>
           <a:xfrm>
-            <a:off x="1325880" y="5294376"/>
+            <a:off x="1325880" y="5394960"/>
             <a:ext cx="10149840" cy="685800"/>
           </a:xfrm>
           <a:prstGeom prst="rect">
@@ -37330,8 +37240,8 @@
             <a:tbl>
               <a:tblPr/>
               <a:tblGrid>
-                <a:gridCol w="5532120"/>
-                <a:gridCol w="5532120"/>
+                <a:gridCol w="5474058"/>
+                <a:gridCol w="5590182"/>
               </a:tblGrid>
               <a:tr h="524256">
                 <a:tc>
@@ -38187,7 +38097,7 @@
         </p:nvSpPr>
         <p:spPr>
           <a:xfrm>
-            <a:off x="548640" y="5294376"/>
+            <a:off x="548640" y="5394960"/>
             <a:ext cx="11064240" cy="685800"/>
           </a:xfrm>
           <a:prstGeom prst="roundRect">
@@ -38209,7 +38119,7 @@
         </p:nvSpPr>
         <p:spPr>
           <a:xfrm>
-            <a:off x="731520" y="5408676"/>
+            <a:off x="731520" y="5509260"/>
             <a:ext cx="457200" cy="457200"/>
           </a:xfrm>
           <a:prstGeom prst="ellipse">
@@ -38229,7 +38139,7 @@
         </p:nvSpPr>
         <p:spPr>
           <a:xfrm>
-            <a:off x="731520" y="5408676"/>
+            <a:off x="731520" y="5509260"/>
             <a:ext cx="457200" cy="457200"/>
           </a:xfrm>
           <a:prstGeom prst="rect">
@@ -38268,7 +38178,7 @@
         </p:nvSpPr>
         <p:spPr>
           <a:xfrm>
-            <a:off x="1325880" y="5294376"/>
+            <a:off x="1325880" y="5394960"/>
             <a:ext cx="10149840" cy="685800"/>
           </a:xfrm>
           <a:prstGeom prst="rect">
@@ -41966,7 +41876,7 @@
         </p:nvSpPr>
         <p:spPr>
           <a:xfrm>
-            <a:off x="585216" y="3029712"/>
+            <a:off x="585216" y="2993136"/>
             <a:ext cx="164592" cy="164592"/>
           </a:xfrm>
           <a:prstGeom prst="ellipse">
@@ -41986,7 +41896,7 @@
         </p:nvSpPr>
         <p:spPr>
           <a:xfrm>
-            <a:off x="914400" y="2837688"/>
+            <a:off x="914400" y="2801112"/>
             <a:ext cx="10607040" cy="1341120"/>
           </a:xfrm>
           <a:prstGeom prst="rect">
@@ -42062,7 +41972,7 @@
         </p:nvSpPr>
         <p:spPr>
           <a:xfrm>
-            <a:off x="585216" y="4480560"/>
+            <a:off x="585216" y="4407408"/>
             <a:ext cx="164592" cy="164592"/>
           </a:xfrm>
           <a:prstGeom prst="ellipse">
@@ -42082,7 +41992,7 @@
         </p:nvSpPr>
         <p:spPr>
           <a:xfrm>
-            <a:off x="914400" y="4288536"/>
+            <a:off x="914400" y="4215384"/>
             <a:ext cx="10607040" cy="944880"/>
           </a:xfrm>
           <a:prstGeom prst="rect">
@@ -42145,6 +42055,102 @@
                 <a:cs typeface="Alexandria" pitchFamily="34" charset="-120"/>
               </a:rPr>
               <a:t> (7th ed.). Pearson.</a:t>
+            </a:r>
+            <a:endParaRPr lang="en-US" sz="2400" dirty="0"/>
+          </a:p>
+        </p:txBody>
+      </p:sp>
+      <p:sp>
+        <p:nvSpPr>
+          <p:cNvPr id="12" name="Dấu đầu dòng"/>
+          <p:cNvSpPr/>
+          <p:nvPr/>
+        </p:nvSpPr>
+        <p:spPr>
+          <a:xfrm>
+            <a:off x="585216" y="5425440"/>
+            <a:ext cx="164592" cy="164592"/>
+          </a:xfrm>
+          <a:prstGeom prst="ellipse">
+            <a:avLst/>
+          </a:prstGeom>
+          <a:solidFill>
+            <a:srgbClr val="FF9259"/>
+          </a:solidFill>
+          <a:ln/>
+        </p:spPr>
+      </p:sp>
+      <p:sp>
+        <p:nvSpPr>
+          <p:cNvPr id="13" name="Text 11"/>
+          <p:cNvSpPr txBox="1"/>
+          <p:nvPr/>
+        </p:nvSpPr>
+        <p:spPr>
+          <a:xfrm>
+            <a:off x="914400" y="5233416"/>
+            <a:ext cx="10607040" cy="944880"/>
+          </a:xfrm>
+          <a:prstGeom prst="rect">
+            <a:avLst/>
+          </a:prstGeom>
+          <a:noFill/>
+          <a:ln/>
+        </p:spPr>
+        <p:txBody>
+          <a:bodyPr wrap="square" lIns="76200" tIns="76200" rIns="76200" bIns="76200" rtlCol="0" anchor="t"/>
+          <a:lstStyle/>
+          <a:p>
+            <a:pPr algn="l" indent="0" marL="0">
+              <a:lnSpc>
+                <a:spcPts val="3100"/>
+              </a:lnSpc>
+              <a:buNone/>
+            </a:pPr>
+            <a:r>
+              <a:rPr lang="en-US" sz="2400" dirty="0">
+                <a:solidFill>
+                  <a:srgbClr val="2E2A3A"/>
+                </a:solidFill>
+                <a:latin typeface="Alexandria" pitchFamily="34" charset="0"/>
+                <a:ea typeface="Alexandria" pitchFamily="34" charset="-122"/>
+                <a:cs typeface="Alexandria" pitchFamily="34" charset="-120"/>
+              </a:rPr>
+              <a:t>Nguyễn, Đ. T. (2011). </a:t>
+            </a:r>
+            <a:pPr algn="l" indent="0" marL="0">
+              <a:lnSpc>
+                <a:spcPts val="3100"/>
+              </a:lnSpc>
+              <a:buNone/>
+            </a:pPr>
+            <a:r>
+              <a:rPr lang="en-US" sz="2400" i="1" dirty="0">
+                <a:solidFill>
+                  <a:srgbClr val="2E2A3A"/>
+                </a:solidFill>
+                <a:latin typeface="Alexandria" pitchFamily="34" charset="0"/>
+                <a:ea typeface="Alexandria" pitchFamily="34" charset="-122"/>
+                <a:cs typeface="Alexandria" pitchFamily="34" charset="-120"/>
+              </a:rPr>
+              <a:t>Phương pháp nghiên cứu khoa học trong kinh doanh</a:t>
+            </a:r>
+            <a:pPr algn="l" indent="0" marL="0">
+              <a:lnSpc>
+                <a:spcPts val="3100"/>
+              </a:lnSpc>
+              <a:buNone/>
+            </a:pPr>
+            <a:r>
+              <a:rPr lang="en-US" sz="2400" dirty="0">
+                <a:solidFill>
+                  <a:srgbClr val="2E2A3A"/>
+                </a:solidFill>
+                <a:latin typeface="Alexandria" pitchFamily="34" charset="0"/>
+                <a:ea typeface="Alexandria" pitchFamily="34" charset="-122"/>
+                <a:cs typeface="Alexandria" pitchFamily="34" charset="-120"/>
+              </a:rPr>
+              <a:t>. NXB Lao động – Xã hội.</a:t>
             </a:r>
             <a:endParaRPr lang="en-US" sz="2400" dirty="0"/>
           </a:p>
@@ -42193,276 +42199,6 @@
             <a:fld id="{F7021451-1387-4CA6-816F-3879F97B5CBC}" type="slidenum">
               <a:rPr b="0" lang="en-US"/>
               <a:t>54</a:t>
-            </a:fld>
-            <a:endParaRPr lang="en-US"/>
-          </a:p>
-        </p:txBody>
-      </p:sp>
-    </p:spTree>
-  </p:cSld>
-  <p:clrMapOvr>
-    <a:masterClrMapping/>
-  </p:clrMapOvr>
-</p:sld>
-</file>
-
-<file path=ppt/slides/slide55.xml><?xml version="1.0" encoding="utf-8"?>
-<p:sld xmlns:a="http://schemas.openxmlformats.org/drawingml/2006/main" xmlns:r="http://schemas.openxmlformats.org/officeDocument/2006/relationships" xmlns:p="http://schemas.openxmlformats.org/presentationml/2006/main">
-  <p:cSld name="Slide 55">
-    <p:spTree>
-      <p:nvGrpSpPr>
-        <p:cNvPr id="1" name=""/>
-        <p:cNvGrpSpPr/>
-        <p:nvPr/>
-      </p:nvGrpSpPr>
-      <p:grpSpPr>
-        <a:xfrm>
-          <a:off x="0" y="0"/>
-          <a:ext cx="0" cy="0"/>
-          <a:chOff x="0" y="0"/>
-          <a:chExt cx="0" cy="0"/>
-        </a:xfrm>
-      </p:grpSpPr>
-      <p:sp>
-        <p:nvSpPr>
-          <p:cNvPr id="2" name="Trang trí"/>
-          <p:cNvSpPr/>
-          <p:nvPr/>
-        </p:nvSpPr>
-        <p:spPr>
-          <a:xfrm>
-            <a:off x="11460175" y="-731520"/>
-            <a:ext cx="1463040" cy="1463040"/>
-          </a:xfrm>
-          <a:prstGeom prst="ellipse">
-            <a:avLst/>
-          </a:prstGeom>
-          <a:solidFill>
-            <a:srgbClr val="FF5178"/>
-          </a:solidFill>
-          <a:ln/>
-        </p:spPr>
-      </p:sp>
-      <p:sp>
-        <p:nvSpPr>
-          <p:cNvPr id="3" name="Trang trí"/>
-          <p:cNvSpPr/>
-          <p:nvPr/>
-        </p:nvSpPr>
-        <p:spPr>
-          <a:xfrm>
-            <a:off x="11505895" y="868680"/>
-            <a:ext cx="274320" cy="274320"/>
-          </a:xfrm>
-          <a:prstGeom prst="ellipse">
-            <a:avLst/>
-          </a:prstGeom>
-          <a:solidFill>
-            <a:srgbClr val="FF9259"/>
-          </a:solidFill>
-          <a:ln/>
-        </p:spPr>
-      </p:sp>
-      <p:sp>
-        <p:nvSpPr>
-          <p:cNvPr id="4" name="Trang trí"/>
-          <p:cNvSpPr/>
-          <p:nvPr/>
-        </p:nvSpPr>
-        <p:spPr>
-          <a:xfrm>
-            <a:off x="-457200" y="6400800"/>
-            <a:ext cx="914400" cy="914400"/>
-          </a:xfrm>
-          <a:prstGeom prst="ellipse">
-            <a:avLst/>
-          </a:prstGeom>
-          <a:solidFill>
-            <a:srgbClr val="FFD23B"/>
-          </a:solidFill>
-          <a:ln/>
-        </p:spPr>
-      </p:sp>
-      <p:sp>
-        <p:nvSpPr>
-          <p:cNvPr id="5" name="Text 0"/>
-          <p:cNvSpPr/>
-          <p:nvPr>
-            <p:ph idx="100" type="title" hasCustomPrompt="1"/>
-          </p:nvPr>
-        </p:nvSpPr>
-        <p:spPr>
-          <a:xfrm>
-            <a:off x="548640" y="365760"/>
-            <a:ext cx="10789920" cy="1280160"/>
-          </a:xfrm>
-          <a:prstGeom prst="rect">
-            <a:avLst/>
-          </a:prstGeom>
-          <a:noFill/>
-          <a:ln/>
-        </p:spPr>
-        <p:txBody>
-          <a:bodyPr wrap="square" lIns="76200" tIns="76200" rIns="76200" bIns="76200" rtlCol="0" anchor="t"/>
-          <a:lstStyle/>
-          <a:p>
-            <a:pPr algn="l" indent="0" marL="0">
-              <a:buNone/>
-            </a:pPr>
-            <a:r>
-              <a:rPr lang="en-US" sz="3600" b="1" dirty="0">
-                <a:solidFill>
-                  <a:srgbClr val="2E2A3A"/>
-                </a:solidFill>
-                <a:latin typeface="Alexandria" pitchFamily="34" charset="0"/>
-                <a:ea typeface="Alexandria" pitchFamily="34" charset="-122"/>
-                <a:cs typeface="Alexandria" pitchFamily="34" charset="-120"/>
-              </a:rPr>
-              <a:t>Tài liệu tham khảo (tiếp)</a:t>
-            </a:r>
-            <a:endParaRPr lang="en-US" sz="3600" dirty="0"/>
-          </a:p>
-        </p:txBody>
-      </p:sp>
-      <p:sp>
-        <p:nvSpPr>
-          <p:cNvPr id="6" name="Dấu đầu dòng"/>
-          <p:cNvSpPr/>
-          <p:nvPr/>
-        </p:nvSpPr>
-        <p:spPr>
-          <a:xfrm>
-            <a:off x="585216" y="1975104"/>
-            <a:ext cx="164592" cy="164592"/>
-          </a:xfrm>
-          <a:prstGeom prst="ellipse">
-            <a:avLst/>
-          </a:prstGeom>
-          <a:solidFill>
-            <a:srgbClr val="FF5178"/>
-          </a:solidFill>
-          <a:ln/>
-        </p:spPr>
-      </p:sp>
-      <p:sp>
-        <p:nvSpPr>
-          <p:cNvPr id="7" name="Text 5"/>
-          <p:cNvSpPr txBox="1"/>
-          <p:nvPr/>
-        </p:nvSpPr>
-        <p:spPr>
-          <a:xfrm>
-            <a:off x="914400" y="1783080"/>
-            <a:ext cx="10607040" cy="944880"/>
-          </a:xfrm>
-          <a:prstGeom prst="rect">
-            <a:avLst/>
-          </a:prstGeom>
-          <a:noFill/>
-          <a:ln/>
-        </p:spPr>
-        <p:txBody>
-          <a:bodyPr wrap="square" lIns="76200" tIns="76200" rIns="76200" bIns="76200" rtlCol="0" anchor="t"/>
-          <a:lstStyle/>
-          <a:p>
-            <a:pPr algn="l" indent="0" marL="0">
-              <a:lnSpc>
-                <a:spcPts val="3100"/>
-              </a:lnSpc>
-              <a:buNone/>
-            </a:pPr>
-            <a:r>
-              <a:rPr lang="en-US" sz="2400" dirty="0">
-                <a:solidFill>
-                  <a:srgbClr val="2E2A3A"/>
-                </a:solidFill>
-                <a:latin typeface="Alexandria" pitchFamily="34" charset="0"/>
-                <a:ea typeface="Alexandria" pitchFamily="34" charset="-122"/>
-                <a:cs typeface="Alexandria" pitchFamily="34" charset="-120"/>
-              </a:rPr>
-              <a:t>Nguyễn, Đ. T. (2011). </a:t>
-            </a:r>
-            <a:pPr algn="l" indent="0" marL="0">
-              <a:lnSpc>
-                <a:spcPts val="3100"/>
-              </a:lnSpc>
-              <a:buNone/>
-            </a:pPr>
-            <a:r>
-              <a:rPr lang="en-US" sz="2400" i="1" dirty="0">
-                <a:solidFill>
-                  <a:srgbClr val="2E2A3A"/>
-                </a:solidFill>
-                <a:latin typeface="Alexandria" pitchFamily="34" charset="0"/>
-                <a:ea typeface="Alexandria" pitchFamily="34" charset="-122"/>
-                <a:cs typeface="Alexandria" pitchFamily="34" charset="-120"/>
-              </a:rPr>
-              <a:t>Phương pháp nghiên cứu khoa học trong kinh doanh</a:t>
-            </a:r>
-            <a:pPr algn="l" indent="0" marL="0">
-              <a:lnSpc>
-                <a:spcPts val="3100"/>
-              </a:lnSpc>
-              <a:buNone/>
-            </a:pPr>
-            <a:r>
-              <a:rPr lang="en-US" sz="2400" dirty="0">
-                <a:solidFill>
-                  <a:srgbClr val="2E2A3A"/>
-                </a:solidFill>
-                <a:latin typeface="Alexandria" pitchFamily="34" charset="0"/>
-                <a:ea typeface="Alexandria" pitchFamily="34" charset="-122"/>
-                <a:cs typeface="Alexandria" pitchFamily="34" charset="-120"/>
-              </a:rPr>
-              <a:t>. NXB Lao động – Xã hội.</a:t>
-            </a:r>
-            <a:endParaRPr lang="en-US" sz="2400" dirty="0"/>
-          </a:p>
-        </p:txBody>
-      </p:sp>
-      <p:sp>
-        <p:nvSpPr>
-          <p:cNvPr id="25" name="Slide Number Placeholder 0"/>
-          <p:cNvSpPr>
-            <a:spLocks noGrp="1"/>
-          </p:cNvSpPr>
-          <p:nvPr>
-            <p:ph type="sldNum" sz="quarter" idx="4294967295"/>
-          </p:nvPr>
-        </p:nvSpPr>
-        <p:spPr>
-          <a:xfrm>
-            <a:off x="10881360" y="6263640"/>
-            <a:ext cx="914400" cy="457200"/>
-          </a:xfrm>
-          <a:prstGeom prst="rect">
-            <a:avLst/>
-          </a:prstGeom>
-          <a:extLst>
-            <a:ext uri="{C572A759-6A51-4108-AA02-DFA0A04FC94B}">
-              <ma14:wrappingTextBoxFlag xmlns:ma14="http://schemas.microsoft.com/office/mac/drawingml/2011/main" val="0"/>
-            </a:ext>
-          </a:extLst>
-        </p:spPr>
-        <p:txBody>
-          <a:bodyPr/>
-          <a:lstStyle>
-            <a:lvl1pPr>
-              <a:defRPr sz="2400">
-                <a:solidFill>
-                  <a:srgbClr val="5B5668"/>
-                </a:solidFill>
-                <a:latin typeface="Alexandria"/>
-                <a:ea typeface="Alexandria"/>
-                <a:cs typeface="Alexandria"/>
-              </a:defRPr>
-            </a:lvl1pPr>
-          </a:lstStyle>
-          <a:p>
-            <a:pPr algn="r"/>
-            <a:fld id="{F7021451-1387-4CA6-816F-3879F97B5CBC}" type="slidenum">
-              <a:rPr b="0" lang="en-US"/>
-              <a:t>55</a:t>
             </a:fld>
             <a:endParaRPr lang="en-US"/>
           </a:p>
@@ -43457,8 +43193,8 @@
             <a:tbl>
               <a:tblPr/>
               <a:tblGrid>
-                <a:gridCol w="5532120"/>
-                <a:gridCol w="5532120"/>
+                <a:gridCol w="5874353"/>
+                <a:gridCol w="5189887"/>
               </a:tblGrid>
               <a:tr h="524256">
                 <a:tc>
@@ -44336,7 +44072,7 @@
         </p:nvSpPr>
         <p:spPr>
           <a:xfrm>
-            <a:off x="548640" y="5294376"/>
+            <a:off x="548640" y="5394960"/>
             <a:ext cx="11064240" cy="685800"/>
           </a:xfrm>
           <a:prstGeom prst="roundRect">
@@ -44358,7 +44094,7 @@
         </p:nvSpPr>
         <p:spPr>
           <a:xfrm>
-            <a:off x="731520" y="5408676"/>
+            <a:off x="731520" y="5509260"/>
             <a:ext cx="457200" cy="457200"/>
           </a:xfrm>
           <a:prstGeom prst="ellipse">
@@ -44378,7 +44114,7 @@
         </p:nvSpPr>
         <p:spPr>
           <a:xfrm>
-            <a:off x="731520" y="5408676"/>
+            <a:off x="731520" y="5509260"/>
             <a:ext cx="457200" cy="457200"/>
           </a:xfrm>
           <a:prstGeom prst="rect">
@@ -44417,7 +44153,7 @@
         </p:nvSpPr>
         <p:spPr>
           <a:xfrm>
-            <a:off x="1325880" y="5294376"/>
+            <a:off x="1325880" y="5394960"/>
             <a:ext cx="10149840" cy="685800"/>
           </a:xfrm>
           <a:prstGeom prst="rect">

--- a/mkt1107/output/MKT1107_W06_slides.pptx
+++ b/mkt1107/output/MKT1107_W06_slides.pptx
@@ -160,19 +160,19 @@
   <p:extLst>
     <p:ext uri="{521415D9-36F7-43E2-AB2F-B90AF26B5E84}">
       <p14:sectionLst xmlns:p14="http://schemas.microsoft.com/office/powerpoint/2010/main">
-        <p14:section name="Mở đầu" id="{fafa4045-0e9d-4eef-5ec0-296b8e6e282f}">
+        <p14:section name="Mở đầu" id="{b1089078-4ab3-e4f8-07e4-ec2eeff67ae8}">
           <p14:sldIdLst>
             <p14:sldId id="256"/>
           </p14:sldIdLst>
         </p14:section>
-        <p14:section name="S1 · Khởi động: in 1.000 phiếu rồi mới thấy câu hỏi sai" id="{e02cffb4-1cd1-8892-27b5-524d2c1a5875}">
+        <p14:section name="S1 · Khởi động: in 1.000 phiếu rồi mới thấy câu hỏi sai" id="{21637cf8-9572-fb78-7a50-12c8d4d9efb8}">
           <p14:sldIdLst>
             <p14:sldId id="257"/>
             <p14:sldId id="258"/>
             <p14:sldId id="259"/>
           </p14:sldIdLst>
         </p14:section>
-        <p14:section name="S2 · 4.1 Một số khái niệm trong nghiên cứu" id="{65319d6c-8b97-382f-178c-046969e8dbc1}">
+        <p14:section name="S2 · 4.1 Một số khái niệm trong nghiên cứu" id="{fa742ac6-c752-564e-d2d6-638d8f52ce0d}">
           <p14:sldIdLst>
             <p14:sldId id="260"/>
             <p14:sldId id="261"/>
@@ -190,7 +190,7 @@
             <p14:sldId id="273"/>
           </p14:sldIdLst>
         </p14:section>
-        <p14:section name="S3 · Chọn thiết kế: khám phá, mô tả hay nhân quả?" id="{33e59f0b-7dfd-782a-73c1-88ec6529bfaf}">
+        <p14:section name="S3 · Chọn thiết kế: khám phá, mô tả hay nhân quả?" id="{178039d5-18dd-a666-4432-4e216d20256c}">
           <p14:sldIdLst>
             <p14:sldId id="274"/>
             <p14:sldId id="275"/>
@@ -204,7 +204,7 @@
             <p14:sldId id="283"/>
           </p14:sldIdLst>
         </p14:section>
-        <p14:section name="S4 · 4.2 Vấn đề nghiên cứu" id="{28b97ebc-ac7f-4839-68eb-859f1e31c18b}">
+        <p14:section name="S4 · 4.2 Vấn đề nghiên cứu" id="{97883a31-1987-8c88-f61d-1188bd39a37f}">
           <p14:sldIdLst>
             <p14:sldId id="284"/>
             <p14:sldId id="285"/>
@@ -218,7 +218,7 @@
             <p14:sldId id="293"/>
           </p14:sldIdLst>
         </p14:section>
-        <p14:section name="S5 · 4.3 Đề cương nghiên cứu marketing" id="{e17ab312-a77c-9d40-f365-4c107955c55a}">
+        <p14:section name="S5 · 4.3 Đề cương nghiên cứu marketing" id="{14cbd439-ae8a-42b1-95ec-47003126dcc9}">
           <p14:sldIdLst>
             <p14:sldId id="294"/>
             <p14:sldId id="295"/>
@@ -232,13 +232,13 @@
             <p14:sldId id="303"/>
           </p14:sldIdLst>
         </p14:section>
-        <p14:section name="S6 · Thực hành nhóm: từ vấn đề đến đề cương" id="{d21d9d21-773a-40a7-676f-edc0c5f4425f}">
+        <p14:section name="S6 · Thực hành nhóm: từ vấn đề đến đề cương" id="{4979c5de-76c9-9e6a-eff0-63758d5ae608}">
           <p14:sldIdLst>
             <p14:sldId id="304"/>
             <p14:sldId id="305"/>
           </p14:sldIdLst>
         </p14:section>
-        <p14:section name="S7 · Kết buổi" id="{ac5d33f8-67b0-e26a-482d-30387fa064b9}">
+        <p14:section name="S7 · Kết buổi" id="{6b206cb5-dedf-f715-a3fb-9033dfe99abb}">
           <p14:sldIdLst>
             <p14:sldId id="306"/>
             <p14:sldId id="307"/>
@@ -16116,7 +16116,7 @@
         <p:spPr>
           <a:xfrm>
             <a:off x="777240" y="2011680"/>
-            <a:ext cx="2377440" cy="566928"/>
+            <a:ext cx="2400910" cy="566928"/>
           </a:xfrm>
           <a:prstGeom prst="roundRect">
             <a:avLst>
@@ -16138,7 +16138,7 @@
         <p:spPr>
           <a:xfrm>
             <a:off x="777240" y="2011680"/>
-            <a:ext cx="2377440" cy="566928"/>
+            <a:ext cx="2400910" cy="566928"/>
           </a:xfrm>
           <a:prstGeom prst="rect">
             <a:avLst/>
@@ -16567,7 +16567,7 @@
         <p:spPr>
           <a:xfrm>
             <a:off x="777240" y="2011680"/>
-            <a:ext cx="2377440" cy="566928"/>
+            <a:ext cx="2462174" cy="566928"/>
           </a:xfrm>
           <a:prstGeom prst="roundRect">
             <a:avLst>
@@ -16589,7 +16589,7 @@
         <p:spPr>
           <a:xfrm>
             <a:off x="777240" y="2011680"/>
-            <a:ext cx="2377440" cy="566928"/>
+            <a:ext cx="2462174" cy="566928"/>
           </a:xfrm>
           <a:prstGeom prst="rect">
             <a:avLst/>
@@ -16995,7 +16995,7 @@
         <p:spPr>
           <a:xfrm>
             <a:off x="777240" y="2011680"/>
-            <a:ext cx="2377440" cy="566928"/>
+            <a:ext cx="2461565" cy="566928"/>
           </a:xfrm>
           <a:prstGeom prst="roundRect">
             <a:avLst>
@@ -17017,7 +17017,7 @@
         <p:spPr>
           <a:xfrm>
             <a:off x="777240" y="2011680"/>
-            <a:ext cx="2377440" cy="566928"/>
+            <a:ext cx="2461565" cy="566928"/>
           </a:xfrm>
           <a:prstGeom prst="rect">
             <a:avLst/>
@@ -17486,7 +17486,7 @@
         <p:spPr>
           <a:xfrm>
             <a:off x="777240" y="2011680"/>
-            <a:ext cx="2377440" cy="566928"/>
+            <a:ext cx="2462784" cy="566928"/>
           </a:xfrm>
           <a:prstGeom prst="roundRect">
             <a:avLst>
@@ -17508,7 +17508,7 @@
         <p:spPr>
           <a:xfrm>
             <a:off x="777240" y="2011680"/>
-            <a:ext cx="2377440" cy="566928"/>
+            <a:ext cx="2462784" cy="566928"/>
           </a:xfrm>
           <a:prstGeom prst="rect">
             <a:avLst/>
@@ -17960,7 +17960,7 @@
         <p:spPr>
           <a:xfrm>
             <a:off x="777240" y="2011680"/>
-            <a:ext cx="2377440" cy="566928"/>
+            <a:ext cx="2468270" cy="566928"/>
           </a:xfrm>
           <a:prstGeom prst="roundRect">
             <a:avLst>
@@ -17982,7 +17982,7 @@
         <p:spPr>
           <a:xfrm>
             <a:off x="777240" y="2011680"/>
-            <a:ext cx="2377440" cy="566928"/>
+            <a:ext cx="2468270" cy="566928"/>
           </a:xfrm>
           <a:prstGeom prst="rect">
             <a:avLst/>
@@ -18411,7 +18411,7 @@
         <p:spPr>
           <a:xfrm>
             <a:off x="777240" y="2011680"/>
-            <a:ext cx="2377440" cy="566928"/>
+            <a:ext cx="2469794" cy="566928"/>
           </a:xfrm>
           <a:prstGeom prst="roundRect">
             <a:avLst>
@@ -18433,7 +18433,7 @@
         <p:spPr>
           <a:xfrm>
             <a:off x="777240" y="2011680"/>
-            <a:ext cx="2377440" cy="566928"/>
+            <a:ext cx="2469794" cy="566928"/>
           </a:xfrm>
           <a:prstGeom prst="rect">
             <a:avLst/>

--- a/mkt1107/output/MKT1107_W06_slides.pptx
+++ b/mkt1107/output/MKT1107_W06_slides.pptx
@@ -160,19 +160,19 @@
   <p:extLst>
     <p:ext uri="{521415D9-36F7-43E2-AB2F-B90AF26B5E84}">
       <p14:sectionLst xmlns:p14="http://schemas.microsoft.com/office/powerpoint/2010/main">
-        <p14:section name="Mở đầu" id="{b1089078-4ab3-e4f8-07e4-ec2eeff67ae8}">
+        <p14:section name="Mở đầu" id="{6643af2d-7059-3cae-29c4-1888c854d90f}">
           <p14:sldIdLst>
             <p14:sldId id="256"/>
           </p14:sldIdLst>
         </p14:section>
-        <p14:section name="S1 · Khởi động: in 1.000 phiếu rồi mới thấy câu hỏi sai" id="{21637cf8-9572-fb78-7a50-12c8d4d9efb8}">
+        <p14:section name="S1 · Khởi động: in 1.000 phiếu rồi mới thấy câu hỏi sai" id="{c1a5791b-6693-d480-6597-c9c220bb83bb}">
           <p14:sldIdLst>
             <p14:sldId id="257"/>
             <p14:sldId id="258"/>
             <p14:sldId id="259"/>
           </p14:sldIdLst>
         </p14:section>
-        <p14:section name="S2 · 4.1 Một số khái niệm trong nghiên cứu" id="{fa742ac6-c752-564e-d2d6-638d8f52ce0d}">
+        <p14:section name="S2 · 4.1 Một số khái niệm trong nghiên cứu" id="{ccec005e-be49-b405-b297-17cadc32952b}">
           <p14:sldIdLst>
             <p14:sldId id="260"/>
             <p14:sldId id="261"/>
@@ -190,7 +190,7 @@
             <p14:sldId id="273"/>
           </p14:sldIdLst>
         </p14:section>
-        <p14:section name="S3 · Chọn thiết kế: khám phá, mô tả hay nhân quả?" id="{178039d5-18dd-a666-4432-4e216d20256c}">
+        <p14:section name="S3 · Chọn thiết kế: khám phá, mô tả hay nhân quả?" id="{62cfcd35-2bdd-9eca-6c1b-a42a22bd92fd}">
           <p14:sldIdLst>
             <p14:sldId id="274"/>
             <p14:sldId id="275"/>
@@ -204,7 +204,7 @@
             <p14:sldId id="283"/>
           </p14:sldIdLst>
         </p14:section>
-        <p14:section name="S4 · 4.2 Vấn đề nghiên cứu" id="{97883a31-1987-8c88-f61d-1188bd39a37f}">
+        <p14:section name="S4 · 4.2 Vấn đề nghiên cứu" id="{f5381a82-804d-3ef2-714a-55be31a968d4}">
           <p14:sldIdLst>
             <p14:sldId id="284"/>
             <p14:sldId id="285"/>
@@ -218,7 +218,7 @@
             <p14:sldId id="293"/>
           </p14:sldIdLst>
         </p14:section>
-        <p14:section name="S5 · 4.3 Đề cương nghiên cứu marketing" id="{14cbd439-ae8a-42b1-95ec-47003126dcc9}">
+        <p14:section name="S5 · 4.3 Đề cương nghiên cứu marketing" id="{2199f599-c9d6-1ae6-271f-859a7e3e2347}">
           <p14:sldIdLst>
             <p14:sldId id="294"/>
             <p14:sldId id="295"/>
@@ -232,13 +232,13 @@
             <p14:sldId id="303"/>
           </p14:sldIdLst>
         </p14:section>
-        <p14:section name="S6 · Thực hành nhóm: từ vấn đề đến đề cương" id="{4979c5de-76c9-9e6a-eff0-63758d5ae608}">
+        <p14:section name="S6 · Thực hành nhóm: từ vấn đề đến đề cương" id="{4cd00c5a-12e9-b072-77a5-7d01122fec73}">
           <p14:sldIdLst>
             <p14:sldId id="304"/>
             <p14:sldId id="305"/>
           </p14:sldIdLst>
         </p14:section>
-        <p14:section name="S7 · Kết buổi" id="{6b206cb5-dedf-f715-a3fb-9033dfe99abb}">
+        <p14:section name="S7 · Kết buổi" id="{c0e7319d-859f-bde7-f051-d5b922d4bbb5}">
           <p14:sldIdLst>
             <p14:sldId id="306"/>
             <p14:sldId id="307"/>

--- a/mkt1107/output/MKT1107_W06_slides.pptx
+++ b/mkt1107/output/MKT1107_W06_slides.pptx
@@ -160,19 +160,19 @@
   <p:extLst>
     <p:ext uri="{521415D9-36F7-43E2-AB2F-B90AF26B5E84}">
       <p14:sectionLst xmlns:p14="http://schemas.microsoft.com/office/powerpoint/2010/main">
-        <p14:section name="Mở đầu" id="{6643af2d-7059-3cae-29c4-1888c854d90f}">
+        <p14:section name="Mở đầu" id="{3df3a9a9-1b87-22d9-7423-8597eb20e048}">
           <p14:sldIdLst>
             <p14:sldId id="256"/>
           </p14:sldIdLst>
         </p14:section>
-        <p14:section name="S1 · Khởi động: in 1.000 phiếu rồi mới thấy câu hỏi sai" id="{c1a5791b-6693-d480-6597-c9c220bb83bb}">
+        <p14:section name="S1 · Khởi động: in 1.000 phiếu rồi mới thấy câu hỏi sai" id="{b30e15fc-18cf-73f0-967e-f394e3159239}">
           <p14:sldIdLst>
             <p14:sldId id="257"/>
             <p14:sldId id="258"/>
             <p14:sldId id="259"/>
           </p14:sldIdLst>
         </p14:section>
-        <p14:section name="S2 · 4.1 Một số khái niệm trong nghiên cứu" id="{ccec005e-be49-b405-b297-17cadc32952b}">
+        <p14:section name="S2 · 4.1 Một số khái niệm trong nghiên cứu" id="{a34e583f-8428-b37e-9204-7b4f727dde12}">
           <p14:sldIdLst>
             <p14:sldId id="260"/>
             <p14:sldId id="261"/>
@@ -190,7 +190,7 @@
             <p14:sldId id="273"/>
           </p14:sldIdLst>
         </p14:section>
-        <p14:section name="S3 · Chọn thiết kế: khám phá, mô tả hay nhân quả?" id="{62cfcd35-2bdd-9eca-6c1b-a42a22bd92fd}">
+        <p14:section name="S3 · Chọn thiết kế: khám phá, mô tả hay nhân quả?" id="{34638123-d98e-7448-faa9-78f1f8b808ec}">
           <p14:sldIdLst>
             <p14:sldId id="274"/>
             <p14:sldId id="275"/>
@@ -204,7 +204,7 @@
             <p14:sldId id="283"/>
           </p14:sldIdLst>
         </p14:section>
-        <p14:section name="S4 · 4.2 Vấn đề nghiên cứu" id="{f5381a82-804d-3ef2-714a-55be31a968d4}">
+        <p14:section name="S4 · 4.2 Vấn đề nghiên cứu" id="{bc110b82-74b8-278d-897b-375b74348efe}">
           <p14:sldIdLst>
             <p14:sldId id="284"/>
             <p14:sldId id="285"/>
@@ -218,7 +218,7 @@
             <p14:sldId id="293"/>
           </p14:sldIdLst>
         </p14:section>
-        <p14:section name="S5 · 4.3 Đề cương nghiên cứu marketing" id="{2199f599-c9d6-1ae6-271f-859a7e3e2347}">
+        <p14:section name="S5 · 4.3 Đề cương nghiên cứu marketing" id="{cf094492-438f-3839-df17-a7585bb8cdbd}">
           <p14:sldIdLst>
             <p14:sldId id="294"/>
             <p14:sldId id="295"/>
@@ -232,13 +232,13 @@
             <p14:sldId id="303"/>
           </p14:sldIdLst>
         </p14:section>
-        <p14:section name="S6 · Thực hành nhóm: từ vấn đề đến đề cương" id="{4cd00c5a-12e9-b072-77a5-7d01122fec73}">
+        <p14:section name="S6 · Thực hành nhóm: từ vấn đề đến đề cương" id="{9246f74d-501a-9db7-0478-5abf20f47a01}">
           <p14:sldIdLst>
             <p14:sldId id="304"/>
             <p14:sldId id="305"/>
           </p14:sldIdLst>
         </p14:section>
-        <p14:section name="S7 · Kết buổi" id="{c0e7319d-859f-bde7-f051-d5b922d4bbb5}">
+        <p14:section name="S7 · Kết buổi" id="{f042ddcb-3b27-6f09-c172-67ebca1f4b31}">
           <p14:sldIdLst>
             <p14:sldId id="306"/>
             <p14:sldId id="307"/>
@@ -10474,18 +10474,18 @@
       </p:sp>
       <p:sp>
         <p:nvSpPr>
-          <p:cNvPr id="6" name="Thẻ Biết mình biết"/>
+          <p:cNvPr id="6" name="Thẻ Đã biết rõ"/>
           <p:cNvSpPr/>
           <p:nvPr/>
         </p:nvSpPr>
         <p:spPr>
           <a:xfrm>
             <a:off x="548640" y="1783080"/>
-            <a:ext cx="3505200" cy="2806700"/>
+            <a:ext cx="3505200" cy="2773680"/>
           </a:xfrm>
           <a:prstGeom prst="roundRect">
             <a:avLst>
-              <a:gd name="adj" fmla="val 5864"/>
+              <a:gd name="adj" fmla="val 5934"/>
             </a:avLst>
           </a:prstGeom>
           <a:solidFill>
@@ -10562,7 +10562,7 @@
         <p:spPr>
           <a:xfrm>
             <a:off x="1371600" y="1920240"/>
-            <a:ext cx="2499360" cy="1076960"/>
+            <a:ext cx="2499360" cy="614680"/>
           </a:xfrm>
           <a:prstGeom prst="rect">
             <a:avLst/>
@@ -10589,7 +10589,7 @@
                 <a:ea typeface="Alexandria" pitchFamily="34" charset="-122"/>
                 <a:cs typeface="Alexandria" pitchFamily="34" charset="-120"/>
               </a:rPr>
-              <a:t>Biết mình biết</a:t>
+              <a:t>Đã biết rõ</a:t>
             </a:r>
             <a:endParaRPr lang="en-US" sz="2800" dirty="0"/>
           </a:p>
@@ -10603,8 +10603,8 @@
         </p:nvSpPr>
         <p:spPr>
           <a:xfrm>
-            <a:off x="685800" y="3042920"/>
-            <a:ext cx="3230880" cy="1501140"/>
+            <a:off x="685800" y="2580640"/>
+            <a:ext cx="3230880" cy="1930400"/>
           </a:xfrm>
           <a:prstGeom prst="rect">
             <a:avLst/>
@@ -10631,7 +10631,7 @@
                 <a:ea typeface="Alexandria" pitchFamily="34" charset="-122"/>
                 <a:cs typeface="Alexandria" pitchFamily="34" charset="-120"/>
               </a:rPr>
-              <a:t>Không cần nghiên cứu</a:t>
+              <a:t>Không cần nghiên cứu</a:t>
             </a:r>
             <a:endParaRPr lang="en-US" sz="2600" dirty="0"/>
           </a:p>
@@ -10639,18 +10639,18 @@
       </p:sp>
       <p:sp>
         <p:nvSpPr>
-          <p:cNvPr id="11" name="Thẻ Biết mình chưa biết"/>
+          <p:cNvPr id="11" name="Thẻ Biết mình thiếu gì"/>
           <p:cNvSpPr/>
           <p:nvPr/>
         </p:nvSpPr>
         <p:spPr>
           <a:xfrm>
             <a:off x="4328160" y="1783080"/>
-            <a:ext cx="3505200" cy="2806700"/>
+            <a:ext cx="3505200" cy="2773680"/>
           </a:xfrm>
           <a:prstGeom prst="roundRect">
             <a:avLst>
-              <a:gd name="adj" fmla="val 5864"/>
+              <a:gd name="adj" fmla="val 5934"/>
             </a:avLst>
           </a:prstGeom>
           <a:solidFill>
@@ -10754,7 +10754,7 @@
                 <a:ea typeface="Alexandria" pitchFamily="34" charset="-122"/>
                 <a:cs typeface="Alexandria" pitchFamily="34" charset="-120"/>
               </a:rPr>
-              <a:t>Biết mình chưa biết</a:t>
+              <a:t>Biết mình thiếu gì</a:t>
             </a:r>
             <a:endParaRPr lang="en-US" sz="2800" dirty="0"/>
           </a:p>
@@ -10769,7 +10769,7 @@
         <p:spPr>
           <a:xfrm>
             <a:off x="4465320" y="3042920"/>
-            <a:ext cx="3230880" cy="1501140"/>
+            <a:ext cx="3230880" cy="1468120"/>
           </a:xfrm>
           <a:prstGeom prst="rect">
             <a:avLst/>
@@ -10796,7 +10796,7 @@
                 <a:ea typeface="Alexandria" pitchFamily="34" charset="-122"/>
                 <a:cs typeface="Alexandria" pitchFamily="34" charset="-120"/>
               </a:rPr>
-              <a:t>Mô tả hoặc nhân quả</a:t>
+              <a:t>Mô tả hoặc nhân quả</a:t>
             </a:r>
             <a:endParaRPr lang="en-US" sz="2600" dirty="0"/>
           </a:p>
@@ -10804,18 +10804,18 @@
       </p:sp>
       <p:sp>
         <p:nvSpPr>
-          <p:cNvPr id="16" name="Thẻ Chưa biết mình chưa biết"/>
+          <p:cNvPr id="16" name="Thẻ Chưa rõ thiếu gì"/>
           <p:cNvSpPr/>
           <p:nvPr/>
         </p:nvSpPr>
         <p:spPr>
           <a:xfrm>
             <a:off x="8107680" y="1783080"/>
-            <a:ext cx="3505200" cy="2806700"/>
+            <a:ext cx="3505200" cy="2773680"/>
           </a:xfrm>
           <a:prstGeom prst="roundRect">
             <a:avLst>
-              <a:gd name="adj" fmla="val 5864"/>
+              <a:gd name="adj" fmla="val 5934"/>
             </a:avLst>
           </a:prstGeom>
           <a:solidFill>
@@ -10892,7 +10892,7 @@
         <p:spPr>
           <a:xfrm>
             <a:off x="8930640" y="1920240"/>
-            <a:ext cx="2499360" cy="1539240"/>
+            <a:ext cx="2499360" cy="1076960"/>
           </a:xfrm>
           <a:prstGeom prst="rect">
             <a:avLst/>
@@ -10919,7 +10919,7 @@
                 <a:ea typeface="Alexandria" pitchFamily="34" charset="-122"/>
                 <a:cs typeface="Alexandria" pitchFamily="34" charset="-120"/>
               </a:rPr>
-              <a:t>Chưa biết mình chưa biết</a:t>
+              <a:t>Chưa rõ thiếu gì</a:t>
             </a:r>
             <a:endParaRPr lang="en-US" sz="2800" dirty="0"/>
           </a:p>
@@ -10933,8 +10933,8 @@
         </p:nvSpPr>
         <p:spPr>
           <a:xfrm>
-            <a:off x="8244840" y="3505200"/>
-            <a:ext cx="3230880" cy="1038860"/>
+            <a:off x="8244840" y="3042920"/>
+            <a:ext cx="3230880" cy="1468120"/>
           </a:xfrm>
           <a:prstGeom prst="rect">
             <a:avLst/>
@@ -10975,7 +10975,7 @@
         </p:nvSpPr>
         <p:spPr>
           <a:xfrm>
-            <a:off x="548640" y="4955540"/>
+            <a:off x="548640" y="4922520"/>
             <a:ext cx="11064240" cy="1102360"/>
           </a:xfrm>
           <a:prstGeom prst="roundRect">
@@ -10997,7 +10997,7 @@
         </p:nvSpPr>
         <p:spPr>
           <a:xfrm>
-            <a:off x="731520" y="5278120"/>
+            <a:off x="731520" y="5245100"/>
             <a:ext cx="457200" cy="457200"/>
           </a:xfrm>
           <a:prstGeom prst="ellipse">
@@ -11017,7 +11017,7 @@
         </p:nvSpPr>
         <p:spPr>
           <a:xfrm>
-            <a:off x="731520" y="5278120"/>
+            <a:off x="731520" y="5245100"/>
             <a:ext cx="457200" cy="457200"/>
           </a:xfrm>
           <a:prstGeom prst="rect">
@@ -11056,7 +11056,7 @@
         </p:nvSpPr>
         <p:spPr>
           <a:xfrm>
-            <a:off x="1325880" y="4955540"/>
+            <a:off x="1325880" y="4922520"/>
             <a:ext cx="10149840" cy="1102360"/>
           </a:xfrm>
           <a:prstGeom prst="rect">
@@ -12056,7 +12056,7 @@
                 <a:ea typeface="Alexandria" pitchFamily="34" charset="-122"/>
                 <a:cs typeface="Alexandria" pitchFamily="34" charset="-120"/>
               </a:rPr>
-              <a:t>Biến thiên đồng thời</a:t>
+              <a:t>Biến thiên đồng thời</a:t>
             </a:r>
             <a:endParaRPr lang="en-US" sz="2800" dirty="0"/>
           </a:p>
@@ -13227,7 +13227,7 @@
       </p:sp>
       <p:sp>
         <p:nvSpPr>
-          <p:cNvPr id="6" name="Thẻ Ngủ mang giày → đau đầu?"/>
+          <p:cNvPr id="6" name="Thẻ Ngủ mang giày → đau đầu?"/>
           <p:cNvSpPr/>
           <p:nvPr/>
         </p:nvSpPr>
@@ -13342,7 +13342,7 @@
                 <a:ea typeface="Alexandria" pitchFamily="34" charset="-122"/>
                 <a:cs typeface="Alexandria" pitchFamily="34" charset="-120"/>
               </a:rPr>
-              <a:t>Ngủ mang giày → đau đầu?</a:t>
+              <a:t>Ngủ mang giày → đau đầu?</a:t>
             </a:r>
             <a:endParaRPr lang="en-US" sz="2800" dirty="0"/>
           </a:p>
@@ -14003,7 +14003,7 @@
                 <a:ea typeface="Alexandria" pitchFamily="34" charset="-122"/>
                 <a:cs typeface="Alexandria" pitchFamily="34" charset="-120"/>
               </a:rPr>
-              <a:t>Dự án khảo sát một lần: viết “có liên hệ”, không viết “làm tăng”</a:t>
+              <a:t>Dự án khảo sát một lần: viết “có liên hệ”, không viết “làm tăng”</a:t>
             </a:r>
             <a:endParaRPr lang="en-US" sz="2600" dirty="0"/>
           </a:p>
@@ -16661,7 +16661,7 @@
                 <a:ea typeface="Alexandria" pitchFamily="34" charset="-122"/>
                 <a:cs typeface="Alexandria" pitchFamily="34" charset="-120"/>
               </a:rPr>
-              <a:t>Một ví điện tử muốn biết bao nhiêu phần trăm sinh viên TP.HCM đang dùng ví, mỗi tháng giao dịch mấy lần, chi bao nhiêu tiền mỗi lần.</a:t>
+              <a:t>Một ví điện tử muốn biết bao nhiêu phần trăm sinh viên TP.HCM đang dùng ví, mỗi tháng giao dịch mấy lần, chi bao nhiêu tiền mỗi lần.</a:t>
             </a:r>
             <a:endParaRPr lang="en-US" sz="2800" dirty="0"/>
           </a:p>
@@ -18528,7 +18528,7 @@
                 <a:ea typeface="Alexandria" pitchFamily="34" charset="-122"/>
                 <a:cs typeface="Alexandria" pitchFamily="34" charset="-120"/>
               </a:rPr>
-              <a:t>Chủ quán kết luận: “Giảm giá giúp tăng doanh số, tháng sau giảm giá tiếp.”</a:t>
+              <a:t>Chủ quán kết luận: “Giảm giá giúp tăng doanh số, tháng sau giảm giá tiếp.”</a:t>
             </a:r>
             <a:endParaRPr lang="en-US" sz="2800" dirty="0"/>
           </a:p>
@@ -25425,7 +25425,7 @@
                 <a:ea typeface="Alexandria" pitchFamily="34" charset="-122"/>
                 <a:cs typeface="Alexandria" pitchFamily="34" charset="-120"/>
               </a:rPr>
-              <a:t>trong học kỳ này</a:t>
+              <a:t>trong học kỳ này</a:t>
             </a:r>
             <a:endParaRPr lang="en-US" sz="2600" dirty="0"/>
           </a:p>
@@ -35690,7 +35690,7 @@
                 <a:ea typeface="Alexandria" pitchFamily="34" charset="-122"/>
                 <a:cs typeface="Alexandria" pitchFamily="34" charset="-120"/>
               </a:rPr>
-              <a:t>B7–8: thu thập, mẫu</a:t>
+              <a:t>B7–8: thu thập, mẫu</a:t>
             </a:r>
             <a:endParaRPr lang="en-US" sz="2500" dirty="0"/>
           </a:p>
@@ -35791,7 +35791,7 @@
                 <a:ea typeface="Alexandria" pitchFamily="34" charset="-122"/>
                 <a:cs typeface="Alexandria" pitchFamily="34" charset="-120"/>
               </a:rPr>
-              <a:t>B9–10: thang đo, nháp</a:t>
+              <a:t>B9–10: thang đo, nháp</a:t>
             </a:r>
             <a:endParaRPr lang="en-US" sz="2500" dirty="0"/>
           </a:p>
@@ -36195,7 +36195,7 @@
                 <a:ea typeface="Alexandria" pitchFamily="34" charset="-122"/>
                 <a:cs typeface="Alexandria" pitchFamily="34" charset="-120"/>
               </a:rPr>
-              <a:t>Sau B13: viết báo cáo</a:t>
+              <a:t>Sau B13: viết báo cáo</a:t>
             </a:r>
             <a:endParaRPr lang="en-US" sz="2500" dirty="0"/>
           </a:p>
@@ -41262,7 +41262,7 @@
                 <a:ea typeface="Alexandria" pitchFamily="34" charset="-122"/>
                 <a:cs typeface="Alexandria" pitchFamily="34" charset="-120"/>
               </a:rPr>
-              <a:t>Đề cương 4.3.1–4.3.9 · nhóm · 7,5% · nộp LMS, hạn …</a:t>
+              <a:t>Đề cương 4.3.1⁠–⁠4.3.9 · nhóm · 7,5% · nộp LMS, hạn …</a:t>
             </a:r>
             <a:endParaRPr lang="en-US" sz="2600" dirty="0"/>
           </a:p>
@@ -41592,7 +41592,7 @@
                 <a:ea typeface="Alexandria" pitchFamily="34" charset="-122"/>
                 <a:cs typeface="Alexandria" pitchFamily="34" charset="-120"/>
               </a:rPr>
-              <a:t>Thu thập dữ liệu — mang theo đề cương</a:t>
+              <a:t>Thu thập dữ liệu — mang theo đề cương</a:t>
             </a:r>
             <a:endParaRPr lang="en-US" sz="2600" dirty="0"/>
           </a:p>
@@ -45672,7 +45672,7 @@
                 <a:ea typeface="Alexandria" pitchFamily="34" charset="-122"/>
                 <a:cs typeface="Alexandria" pitchFamily="34" charset="-120"/>
               </a:rPr>
-              <a:t>Mục tiêu cụ thể</a:t>
+              <a:t>Mục tiêu cụ thể</a:t>
             </a:r>
             <a:endParaRPr lang="en-US" sz="2800" dirty="0"/>
           </a:p>
@@ -46044,7 +46044,7 @@
                 <a:ea typeface="Alexandria" pitchFamily="34" charset="-122"/>
                 <a:cs typeface="Alexandria" pitchFamily="34" charset="-120"/>
               </a:rPr>
-              <a:t>Chỉ có ở định lượng</a:t>
+              <a:t>Chỉ có ở định lượng</a:t>
             </a:r>
             <a:endParaRPr lang="en-US" sz="2600" dirty="0"/>
           </a:p>

--- a/mkt1107/output/MKT1107_W06_slides.pptx
+++ b/mkt1107/output/MKT1107_W06_slides.pptx
@@ -160,19 +160,19 @@
   <p:extLst>
     <p:ext uri="{521415D9-36F7-43E2-AB2F-B90AF26B5E84}">
       <p14:sectionLst xmlns:p14="http://schemas.microsoft.com/office/powerpoint/2010/main">
-        <p14:section name="Mở đầu" id="{3df3a9a9-1b87-22d9-7423-8597eb20e048}">
+        <p14:section name="Mở đầu" id="{e1138e26-991c-c383-7de3-d19a792c12a7}">
           <p14:sldIdLst>
             <p14:sldId id="256"/>
           </p14:sldIdLst>
         </p14:section>
-        <p14:section name="S1 · Khởi động: in 1.000 phiếu rồi mới thấy câu hỏi sai" id="{b30e15fc-18cf-73f0-967e-f394e3159239}">
+        <p14:section name="S1 · Khởi động: in 1.000 phiếu rồi mới thấy câu hỏi sai" id="{2c2c7c82-5adb-aa82-4c66-6f0e777ce62c}">
           <p14:sldIdLst>
             <p14:sldId id="257"/>
             <p14:sldId id="258"/>
             <p14:sldId id="259"/>
           </p14:sldIdLst>
         </p14:section>
-        <p14:section name="S2 · 4.1 Một số khái niệm trong nghiên cứu" id="{a34e583f-8428-b37e-9204-7b4f727dde12}">
+        <p14:section name="S2 · 4.1 Một số khái niệm trong nghiên cứu" id="{c4a7d5a0-9783-05a5-4b3b-537bee725cb8}">
           <p14:sldIdLst>
             <p14:sldId id="260"/>
             <p14:sldId id="261"/>
@@ -190,7 +190,7 @@
             <p14:sldId id="273"/>
           </p14:sldIdLst>
         </p14:section>
-        <p14:section name="S3 · Chọn thiết kế: khám phá, mô tả hay nhân quả?" id="{34638123-d98e-7448-faa9-78f1f8b808ec}">
+        <p14:section name="S3 · Chọn thiết kế: khám phá, mô tả hay nhân quả?" id="{9f44ca48-b4ec-9f3b-e9ae-85e438af0310}">
           <p14:sldIdLst>
             <p14:sldId id="274"/>
             <p14:sldId id="275"/>
@@ -204,7 +204,7 @@
             <p14:sldId id="283"/>
           </p14:sldIdLst>
         </p14:section>
-        <p14:section name="S4 · 4.2 Vấn đề nghiên cứu" id="{bc110b82-74b8-278d-897b-375b74348efe}">
+        <p14:section name="S4 · 4.2 Vấn đề nghiên cứu" id="{32522706-d660-0f16-bfb9-5618093e3d24}">
           <p14:sldIdLst>
             <p14:sldId id="284"/>
             <p14:sldId id="285"/>
@@ -218,7 +218,7 @@
             <p14:sldId id="293"/>
           </p14:sldIdLst>
         </p14:section>
-        <p14:section name="S5 · 4.3 Đề cương nghiên cứu marketing" id="{cf094492-438f-3839-df17-a7585bb8cdbd}">
+        <p14:section name="S5 · 4.3 Đề cương nghiên cứu marketing" id="{781234a6-60b5-3c3e-453c-6b64625dae45}">
           <p14:sldIdLst>
             <p14:sldId id="294"/>
             <p14:sldId id="295"/>
@@ -232,13 +232,13 @@
             <p14:sldId id="303"/>
           </p14:sldIdLst>
         </p14:section>
-        <p14:section name="S6 · Thực hành nhóm: từ vấn đề đến đề cương" id="{9246f74d-501a-9db7-0478-5abf20f47a01}">
+        <p14:section name="S6 · Thực hành nhóm: từ vấn đề đến đề cương" id="{846b4d6d-06f9-0090-d5a5-e21b06a9544e}">
           <p14:sldIdLst>
             <p14:sldId id="304"/>
             <p14:sldId id="305"/>
           </p14:sldIdLst>
         </p14:section>
-        <p14:section name="S7 · Kết buổi" id="{f042ddcb-3b27-6f09-c172-67ebca1f4b31}">
+        <p14:section name="S7 · Kết buổi" id="{6b4e7cf7-b222-00c1-09fa-6fddd30f92ad}">
           <p14:sldIdLst>
             <p14:sldId id="306"/>
             <p14:sldId id="307"/>
@@ -6727,9 +6727,9 @@
             <a:tbl>
               <a:tblPr/>
               <a:tblGrid>
-                <a:gridCol w="3298301"/>
-                <a:gridCol w="4590033"/>
-                <a:gridCol w="3175906"/>
+                <a:gridCol w="3356074"/>
+                <a:gridCol w="4555887"/>
+                <a:gridCol w="3152280"/>
               </a:tblGrid>
               <a:tr h="524256">
                 <a:tc>
@@ -7915,9 +7915,9 @@
             <a:tbl>
               <a:tblPr/>
               <a:tblGrid>
-                <a:gridCol w="3288171"/>
-                <a:gridCol w="4416832"/>
-                <a:gridCol w="3359237"/>
+                <a:gridCol w="3369219"/>
+                <a:gridCol w="4370796"/>
+                <a:gridCol w="3324225"/>
               </a:tblGrid>
               <a:tr h="524256">
                 <a:tc>
@@ -32777,9 +32777,9 @@
             <a:tbl>
               <a:tblPr/>
               <a:tblGrid>
-                <a:gridCol w="2868384"/>
-                <a:gridCol w="3378622"/>
-                <a:gridCol w="4817234"/>
+                <a:gridCol w="2895041"/>
+                <a:gridCol w="3367633"/>
+                <a:gridCol w="4801567"/>
               </a:tblGrid>
               <a:tr h="524256">
                 <a:tc>
@@ -34180,8 +34180,8 @@
             <a:tbl>
               <a:tblPr/>
               <a:tblGrid>
-                <a:gridCol w="3487374"/>
-                <a:gridCol w="7576866"/>
+                <a:gridCol w="3532504"/>
+                <a:gridCol w="7531736"/>
               </a:tblGrid>
               <a:tr h="524256">
                 <a:tc>
@@ -43193,8 +43193,8 @@
             <a:tbl>
               <a:tblPr/>
               <a:tblGrid>
-                <a:gridCol w="5874353"/>
-                <a:gridCol w="5189887"/>
+                <a:gridCol w="5938775"/>
+                <a:gridCol w="5125465"/>
               </a:tblGrid>
               <a:tr h="524256">
                 <a:tc>

--- a/mkt1107/output/MKT1107_W06_slides.pptx
+++ b/mkt1107/output/MKT1107_W06_slides.pptx
@@ -160,19 +160,19 @@
   <p:extLst>
     <p:ext uri="{521415D9-36F7-43E2-AB2F-B90AF26B5E84}">
       <p14:sectionLst xmlns:p14="http://schemas.microsoft.com/office/powerpoint/2010/main">
-        <p14:section name="Mở đầu" id="{e1138e26-991c-c383-7de3-d19a792c12a7}">
+        <p14:section name="Mở đầu" id="{6d09536d-26de-826d-5b35-d25bba348121}">
           <p14:sldIdLst>
             <p14:sldId id="256"/>
           </p14:sldIdLst>
         </p14:section>
-        <p14:section name="S1 · Khởi động: in 1.000 phiếu rồi mới thấy câu hỏi sai" id="{2c2c7c82-5adb-aa82-4c66-6f0e777ce62c}">
+        <p14:section name="S1 · Khởi động: in 1.000 phiếu rồi mới thấy câu hỏi sai" id="{ed76d7a9-a247-2e31-a6eb-87559e91cf92}">
           <p14:sldIdLst>
             <p14:sldId id="257"/>
             <p14:sldId id="258"/>
             <p14:sldId id="259"/>
           </p14:sldIdLst>
         </p14:section>
-        <p14:section name="S2 · 4.1 Một số khái niệm trong nghiên cứu" id="{c4a7d5a0-9783-05a5-4b3b-537bee725cb8}">
+        <p14:section name="S2 · 4.1 Một số khái niệm trong nghiên cứu" id="{f1f456c4-09cb-4c9a-ac3e-1dac3c63a0a6}">
           <p14:sldIdLst>
             <p14:sldId id="260"/>
             <p14:sldId id="261"/>
@@ -190,7 +190,7 @@
             <p14:sldId id="273"/>
           </p14:sldIdLst>
         </p14:section>
-        <p14:section name="S3 · Chọn thiết kế: khám phá, mô tả hay nhân quả?" id="{9f44ca48-b4ec-9f3b-e9ae-85e438af0310}">
+        <p14:section name="S3 · Chọn thiết kế: khám phá, mô tả hay nhân quả?" id="{17676a29-9f43-4802-0f0b-5e07d13c095f}">
           <p14:sldIdLst>
             <p14:sldId id="274"/>
             <p14:sldId id="275"/>
@@ -204,7 +204,7 @@
             <p14:sldId id="283"/>
           </p14:sldIdLst>
         </p14:section>
-        <p14:section name="S4 · 4.2 Vấn đề nghiên cứu" id="{32522706-d660-0f16-bfb9-5618093e3d24}">
+        <p14:section name="S4 · 4.2 Vấn đề nghiên cứu" id="{57cc978c-5ee3-e889-9f15-2e2d4f9ad72e}">
           <p14:sldIdLst>
             <p14:sldId id="284"/>
             <p14:sldId id="285"/>
@@ -218,7 +218,7 @@
             <p14:sldId id="293"/>
           </p14:sldIdLst>
         </p14:section>
-        <p14:section name="S5 · 4.3 Đề cương nghiên cứu marketing" id="{781234a6-60b5-3c3e-453c-6b64625dae45}">
+        <p14:section name="S5 · 4.3 Đề cương nghiên cứu marketing" id="{3432df4a-6313-3da2-99f4-45028e72b394}">
           <p14:sldIdLst>
             <p14:sldId id="294"/>
             <p14:sldId id="295"/>
@@ -232,13 +232,13 @@
             <p14:sldId id="303"/>
           </p14:sldIdLst>
         </p14:section>
-        <p14:section name="S6 · Thực hành nhóm: từ vấn đề đến đề cương" id="{846b4d6d-06f9-0090-d5a5-e21b06a9544e}">
+        <p14:section name="S6 · Thực hành nhóm: từ vấn đề đến đề cương" id="{bf35e921-ced5-0b2b-d621-180db40d1c48}">
           <p14:sldIdLst>
             <p14:sldId id="304"/>
             <p14:sldId id="305"/>
           </p14:sldIdLst>
         </p14:section>
-        <p14:section name="S7 · Kết buổi" id="{6b4e7cf7-b222-00c1-09fa-6fddd30f92ad}">
+        <p14:section name="S7 · Kết buổi" id="{f83c1766-52a0-cb66-00cc-7d2316f4fe87}">
           <p14:sldIdLst>
             <p14:sldId id="306"/>
             <p14:sldId id="307"/>
@@ -1560,7 +1560,8 @@
           <a:p>
             <a:r>
               <a:rPr lang="en-US" dirty="0"/>
-              <a:t>Hoạt động 8 phút, làm theo cặp với bạn ngồi cạnh, không cần chuẩn bị gì. Mục đích: luyện hai việc nhóm sẽ phải làm trong đề cương — ghi đúng loại thiết kế ở mục 4.3.2, và biết dữ liệu của mình được phép nói đến đâu (“có liên hệ” hay “gây ra”).
+              <a:t>Thời gian: phút 40–48 của buổi học.
+Hoạt động 8 phút, làm theo cặp với bạn ngồi cạnh, không cần chuẩn bị gì. Mục đích: luyện hai việc nhóm sẽ phải làm trong đề cương — ghi đúng loại thiết kế ở mục 4.3.2, và biết dữ liệu của mình được phép nói đến đâu (“có liên hệ” hay “gây ra”).
 Mốc thời gian: phút 40 đọc kịch bản mở đầu và chiếu tình huống 1; phút 41–46 sáu tình huống (đọc → 30 giây thảo luận → 3–2–1 giơ tay → nói đáp án một câu); phút 46–48 chữa kỹ tình huống 4 và 6. Nếu chạy quá giờ, bỏ tình huống 5; giữ 3, 4, 6.</a:t>
             </a:r>
             <a:endParaRPr lang="en-US" dirty="0"/>
@@ -1649,7 +1650,8 @@
           <a:p>
             <a:r>
               <a:rPr lang="en-US" dirty="0"/>
-              <a:t>Phần khởi động 8 phút gồm hai việc: một tình huống mở đầu (khoảng 3 phút) và kiểm tra nhanh M3 cùng hướng dự án của các nhóm (không quá 4 phút).
+              <a:t>Thời gian: phút 0–8 của buổi học.
+Phần khởi động 8 phút gồm hai việc: một tình huống mở đầu (khoảng 3 phút) và kiểm tra nhanh M3 cùng hướng dự án của các nhóm (không quá 4 phút).
 Mục đích: để lớp tự thấy hậu quả của việc làm nghiên cứu mà không có “bản vẽ”, trước khi nghe khái niệm thiết kế nghiên cứu. Chưa nói tên bài; để câu trả lời của sinh viên dẫn tới khái niệm.
 Giữ nhịp nhanh: phần này chỉ là cửa vào. Câu cần ghi lên bảng sau tình huống là “thiếu bản vẽ” — sẽ quay lại câu này nhiều lần trong buổi.</a:t>
             </a:r>
@@ -1739,7 +1741,8 @@
           <a:p>
             <a:r>
               <a:rPr lang="en-US" dirty="0"/>
-              <a:t>Kịch bản mở đầu: “Mình thử dùng ngay những gì vừa học. Có 6 tình huống. Mỗi tình huống, 30 giây bàn với bạn bên cạnh, rồi khi tôi đếm 3–2–1 thì giơ tay: 1 ngón là khám phá, 2 ngón là mô tả, 3 ngón là nhân quả. Có một ký hiệu mới: nếu tình huống đưa ra một kết luận ‘A gây ra B’ mà các bạn thấy chưa đủ ba điều kiện, thì nắm tay. Cả lớp giơ cùng lúc. Bắt đầu.”
+              <a:t>Thời gian: mỗi tình huống 30 giây bàn với bạn.
+Kịch bản mở đầu: “Mình thử dùng ngay những gì vừa học. Có 6 tình huống. Mỗi tình huống, 30 giây bàn với bạn bên cạnh, rồi khi tôi đếm 3–2–1 thì giơ tay: 1 ngón là khám phá, 2 ngón là mô tả, 3 ngón là nhân quả. Có một ký hiệu mới: nếu tình huống đưa ra một kết luận ‘A gây ra B’ mà các bạn thấy chưa đủ ba điều kiện, thì nắm tay. Cả lớp giơ cùng lúc. Bắt đầu.”
 Nếu ít bạn giơ tay: nhắc “giơ cùng lúc, sai cũng không sao — đây là luyện tập”; giảng viên làm mẫu đếm 3–2–1. Không chấm điểm, không bắt buộc; bạn nào không muốn giơ tay có thể ghi đáp án ra giấy.
 Các tình huống đều là giả định. Hiện lần lượt từng tình huống ở các slide sau; mỗi tình huống khoảng 45 giây.</a:t>
             </a:r>
@@ -2465,7 +2468,8 @@
           <a:p>
             <a:r>
               <a:rPr lang="en-US" dirty="0"/>
-              <a:t>Không giảng. Thông báo giờ quay lại — giảng viên điền giờ cụ thể vào chỗ “…” trên slide trước buổi học.
+              <a:t>Thời gian: giải lao 15 phút.
+Không giảng. Thông báo giờ quay lại — giảng viên điền giờ cụ thể vào chỗ “…” trên slide trước buổi học.
 Gợi ý cho các nhóm tranh thủ giờ nghỉ: mở lại M1 (quyết định marketing nhóm đã chọn) để chuẩn bị cho phần vấn đề quản trị và vấn đề nghiên cứu ngay sau giải lao.
 Giảng viên dùng giờ giải lao chuẩn bị phiếu nhóm “Từ vấn đề đến đề cương” để phát ở phần thực hành, và ghi lại trên góc bảng số nhóm định lượng / định tính đã đếm ở đầu buổi.</a:t>
             </a:r>
@@ -2555,7 +2559,8 @@
           <a:p>
             <a:r>
               <a:rPr lang="en-US" dirty="0"/>
-              <a:t>Phần này khoảng 19 phút: vì sao xác định vấn đề là bước quan trọng nhất (1 phút); vấn đề quản trị và vấn đề nghiên cứu, năm cặp ví dụ (6 phút); mục tiêu SMART (4 phút); bốn bước xác định vấn đề và bốn điều cần hỏi người ra quyết định (4 phút); năm yếu tố môi trường và nguồn lực của dự án sinh viên (4 phút).
+              <a:t>Thời gian: phút 63–82 của buổi học.
+Phần này khoảng 19 phút: vì sao xác định vấn đề là bước quan trọng nhất (1 phút); vấn đề quản trị và vấn đề nghiên cứu, năm cặp ví dụ (6 phút); mục tiêu SMART (4 phút); bốn bước xác định vấn đề và bốn điều cần hỏi người ra quyết định (4 phút); năm yếu tố môi trường và nguồn lực của dự án sinh viên (4 phút).
 Câu dẫn sau giải lao: “Trước giờ nghỉ, chúng ta học cách chọn thiết kế. Nhưng thiết kế nào cũng vô ích nếu nhóm trả lời sai câu hỏi. Phần này học cách đặt đúng câu hỏi.”</a:t>
             </a:r>
             <a:endParaRPr lang="en-US" dirty="0"/>
@@ -3550,7 +3555,8 @@
           <a:p>
             <a:r>
               <a:rPr lang="en-US" dirty="0"/>
-              <a:t>Phần này khoảng 18 phút: đề cương là hợp đồng và 9 nội dung (2 phút); 4.3.1–4.3.4 — những gì nhóm đã có và sẽ học tiếp (5 phút); 4.3.5 kế hoạch phân tích (4 phút); 4.3.6 giới hạn (2 phút); 4.3.7 thời biểu (2 phút); 4.3.8 kinh phí (1 phút); 4.3.9 báo cáo (1 phút); năm lỗi thường gặp (1 phút) làm cầu nối sang thực hành.
+              <a:t>Thời gian: phút 82–100 của buổi học.
+Phần này khoảng 18 phút: đề cương là hợp đồng và 9 nội dung (2 phút); 4.3.1–4.3.4 — những gì nhóm đã có và sẽ học tiếp (5 phút); 4.3.5 kế hoạch phân tích (4 phút); 4.3.6 giới hạn (2 phút); 4.3.7 thời biểu (2 phút); 4.3.8 kinh phí (1 phút); 4.3.9 báo cáo (1 phút); năm lỗi thường gặp (1 phút) làm cầu nối sang thực hành.
 Lưu ý cho giảng viên: slide UEF Bài 4 dừng ở 4.3.4; các slide 4.3.5–4.3.9 soạn mới từ tài liệu học tập Bài 4. Slide UEF #20–#21 (lỗi người trả lời, từ ngữ trong bảng hỏi) không dùng hôm nay — để dành Buổi 10–12.</a:t>
             </a:r>
             <a:endParaRPr lang="en-US" dirty="0"/>
@@ -4547,7 +4553,8 @@
           <a:p>
             <a:r>
               <a:rPr lang="en-US" dirty="0"/>
-              <a:t>Chuyển sang 45 phút thực hành nhóm. Phát phiếu nhóm. Các nhóm ngồi theo nhóm dự án (2–3 bạn), mang theo M1 (quyết định marketing), M3 (tổng quan tài liệu), hướng dự án đã chọn và máy tính.
+              <a:t>Thời gian: phút 100–145 của buổi học.
+Chuyển sang 45 phút thực hành nhóm. Phát phiếu nhóm. Các nhóm ngồi theo nhóm dự án (2–3 bạn), mang theo M1 (quyết định marketing), M3 (tổng quan tài liệu), hướng dự án đã chọn và máy tính.
 Nói: “Phần khó nhất của đề cương không phải là viết cho dài, mà là làm cho vấn đề – mục tiêu – câu hỏi – kế hoạch phân tích khớp với nhau. Hôm nay nhóm làm đúng phần khó đó, có tôi đi kèm. Phiếu nhóm hôm nay là bản nháp các mục 4.3.1, 4.3.5 và 4.3.7 của M4.”
 Giảng viên đi từng bàn, tìm năm lỗi vừa nêu.</a:t>
             </a:r>
@@ -4637,7 +4644,8 @@
           <a:p>
             <a:r>
               <a:rPr lang="en-US" dirty="0"/>
-              <a:t>Phần dài nhất của buổi, khoảng 32 phút. Thứ tự: cấu trúc Bài 4 (1 phút) → thiết kế nghiên cứu là bản vẽ (4 phút) → ý tưởng và khoảng trống (4 phút) → mục tiêu, câu hỏi, giả thuyết (6 phút) → định tính và định lượng dùng lý thuyết thế nào (5 phút) → khám phá, mô tả, nhân quả (5 phút) → ví dụ quan sát (3 phút) → ba điều kiện nhân quả và biến thứ ba (khoảng 7 phút).
+              <a:t>Thời gian: phút 8–40 của buổi học.
+Phần dài nhất của buổi, khoảng 32 phút. Thứ tự: cấu trúc Bài 4 (1 phút) → thiết kế nghiên cứu là bản vẽ (4 phút) → ý tưởng và khoảng trống (4 phút) → mục tiêu, câu hỏi, giả thuyết (6 phút) → định tính và định lượng dùng lý thuyết thế nào (5 phút) → khám phá, mô tả, nhân quả (5 phút) → ví dụ quan sát (3 phút) → ba điều kiện nhân quả và biến thứ ba (khoảng 7 phút).
 Nếu chậm giờ, rút gọn slide ví dụ quan sát (Harley-Davidson, Paco Underhill) còn một câu; giữ nguyên phần ba điều kiện nhân quả vì hoạt động “Chọn thiết kế” ngay sau đó dựa vào phần này.</a:t>
             </a:r>
             <a:endParaRPr lang="en-US" dirty="0"/>
@@ -4726,7 +4734,9 @@
           <a:p>
             <a:r>
               <a:rPr lang="en-US" dirty="0"/>
-              <a:t>Để slide này trên màn hình suốt 45 phút. Chặng 1 (8'): viết vấn đề quản trị (“Có nên…?”, “Nên chọn… hay…?”) và vấn đề nghiên cứu (“Xác định…”, “Đo lường…”, “So sánh…”); tự kiểm tra vấn đề nghiên cứu có phải là giải pháp không. Chặng 2 (12'): 1 mục tiêu tổng quát, 2–4 mục tiêu cụ thể, kiểm tra SMART; mỗi mục tiêu một câu hỏi; nhóm định lượng viết giả thuyết dựa trên M3 (ghi tác giả, năm), nhóm định tính thay bằng “các khía cạnh cần tìm hiểu”. Chặng 3 (5'): đối tượng nghiên cứu, đối tượng khảo sát; phạm vi không gian, thời gian, nội dung. Chặng 4 (13'): bảng kế hoạch phân tích — mỗi câu hỏi một dòng (biến, cách phân tích viết bằng lời, công cụ); phác thời biểu từ Buổi 7 đến sau Buổi 13, mỗi việc một người phụ trách. Chặng 5 (7'): 3–4 nhóm đọc vấn đề nghiên cứu + 1 mục tiêu cụ thể + dòng phân tích tương ứng; các nhóm khác tự hỏi mục tiêu của mình đủ SMART chưa.
+              <a:t>Thời gian: 45 phút.
+Phân bổ thời gian — chặng 1: 8 phút; chặng 2: 12 phút; chặng 3: 5 phút; chặng 4: 13 phút; chặng 5: 7 phút; (chặng 5 gốc: “3–4 nhóm chia sẻ, mỗi nhóm 1 phút”).
+Để slide này trên màn hình suốt 45 phút. Chặng 1 (8'): viết vấn đề quản trị (“Có nên…?”, “Nên chọn… hay…?”) và vấn đề nghiên cứu (“Xác định…”, “Đo lường…”, “So sánh…”); tự kiểm tra vấn đề nghiên cứu có phải là giải pháp không. Chặng 2 (12'): 1 mục tiêu tổng quát, 2–4 mục tiêu cụ thể, kiểm tra SMART; mỗi mục tiêu một câu hỏi; nhóm định lượng viết giả thuyết dựa trên M3 (ghi tác giả, năm), nhóm định tính thay bằng “các khía cạnh cần tìm hiểu”. Chặng 3 (5'): đối tượng nghiên cứu, đối tượng khảo sát; phạm vi không gian, thời gian, nội dung. Chặng 4 (13'): bảng kế hoạch phân tích — mỗi câu hỏi một dòng (biến, cách phân tích viết bằng lời, công cụ); phác thời biểu từ Buổi 7 đến sau Buổi 13, mỗi việc một người phụ trách. Chặng 5 (7'): 3–4 nhóm đọc vấn đề nghiên cứu + 1 mục tiêu cụ thể + dòng phân tích tương ứng; các nhóm khác tự hỏi mục tiêu của mình đủ SMART chưa.
 Sản phẩm: phiếu nhóm — bản nháp 4.3.1, 4.3.5, 4.3.7; hôm nay không nộp, lưu lại để hoàn thiện M4.
 Lưu ý cho giảng viên: kịch bản đầy đủ trong phiếu “Từ vấn đề đến đề cương” (W6_activity_tu_van_de_den_de_cuong.md).</a:t>
             </a:r>
@@ -4816,7 +4826,8 @@
           <a:p>
             <a:r>
               <a:rPr lang="en-US" dirty="0"/>
-              <a:t>5 phút cuối. Cảm ơn các nhóm đã chia sẻ, tóm một câu: “Hôm nay các nhóm đã có bản nháp phần khó nhất của đề cương: vấn đề, mục tiêu, câu hỏi và kế hoạch phân tích khớp với nhau.”
+              <a:t>Thời gian: phút 145–150 của buổi học.
+5 phút cuối. Cảm ơn các nhóm đã chia sẻ, tóm một câu: “Hôm nay các nhóm đã có bản nháp phần khó nhất của đề cương: vấn đề, mục tiêu, câu hỏi và kế hoạch phân tích khớp với nhau.”
 Phát phiếu ra về (giấy nhỏ), rồi giao bài tập M4 và nối sang Buổi 7.
 Nếu phần thực hành bị trễ, rút phiếu ra về còn câu 1 (vấn đề nghiên cứu trong một câu) nhưng vẫn giữ phần giao M4 và hạn nộp. Nhắc nhóm nào chưa nộp M3 ở lại gặp giảng viên sau giờ học.</a:t>
             </a:r>
@@ -5592,8 +5603,8 @@
         </p:nvSpPr>
         <p:spPr>
           <a:xfrm>
-            <a:off x="3840480" y="2103120"/>
-            <a:ext cx="6766560" cy="2194560"/>
+            <a:off x="3840480" y="2240280"/>
+            <a:ext cx="6766560" cy="2377440"/>
           </a:xfrm>
           <a:prstGeom prst="rect">
             <a:avLst/>
@@ -14578,49 +14589,7 @@
       </p:sp>
       <p:sp>
         <p:nvSpPr>
-          <p:cNvPr id="8" name="Text 6"/>
-          <p:cNvSpPr txBox="1"/>
-          <p:nvPr/>
-        </p:nvSpPr>
-        <p:spPr>
-          <a:xfrm>
-            <a:off x="3840480" y="1417320"/>
-            <a:ext cx="6766560" cy="594360"/>
-          </a:xfrm>
-          <a:prstGeom prst="rect">
-            <a:avLst/>
-          </a:prstGeom>
-          <a:noFill/>
-          <a:ln/>
-        </p:spPr>
-        <p:txBody>
-          <a:bodyPr wrap="square" lIns="76200" tIns="76200" rIns="76200" bIns="76200" rtlCol="0" anchor="t"/>
-          <a:lstStyle/>
-          <a:p>
-            <a:pPr algn="l" indent="0" marL="0">
-              <a:lnSpc>
-                <a:spcPts val="3600"/>
-              </a:lnSpc>
-              <a:buNone/>
-            </a:pPr>
-            <a:r>
-              <a:rPr lang="en-US" sz="2800" b="1" dirty="0">
-                <a:solidFill>
-                  <a:srgbClr val="962B7C"/>
-                </a:solidFill>
-                <a:latin typeface="Alexandria" pitchFamily="34" charset="0"/>
-                <a:ea typeface="Alexandria" pitchFamily="34" charset="-122"/>
-                <a:cs typeface="Alexandria" pitchFamily="34" charset="-120"/>
-              </a:rPr>
-              <a:t>40–48 phút</a:t>
-            </a:r>
-            <a:endParaRPr lang="en-US" sz="2800" dirty="0"/>
-          </a:p>
-        </p:txBody>
-      </p:sp>
-      <p:sp>
-        <p:nvSpPr>
-          <p:cNvPr id="9" name="Text 0"/>
+          <p:cNvPr id="8" name="Text 0"/>
           <p:cNvSpPr/>
           <p:nvPr>
             <p:ph idx="100" type="title" hasCustomPrompt="1"/>
@@ -14628,8 +14597,8 @@
         </p:nvSpPr>
         <p:spPr>
           <a:xfrm>
-            <a:off x="3840480" y="2103120"/>
-            <a:ext cx="6766560" cy="2194560"/>
+            <a:off x="3840480" y="2240280"/>
+            <a:ext cx="6766560" cy="2377440"/>
           </a:xfrm>
           <a:prstGeom prst="rect">
             <a:avLst/>
@@ -14638,7 +14607,7 @@
           <a:ln/>
         </p:spPr>
         <p:txBody>
-          <a:bodyPr wrap="square" lIns="76200" tIns="76200" rIns="76200" bIns="76200" rtlCol="0" anchor="t"/>
+          <a:bodyPr wrap="square" lIns="76200" tIns="76200" rIns="76200" bIns="76200" rtlCol="0" anchor="ctr"/>
           <a:lstStyle/>
           <a:p>
             <a:pPr algn="l" indent="0" marL="0">
@@ -14873,49 +14842,7 @@
       </p:sp>
       <p:sp>
         <p:nvSpPr>
-          <p:cNvPr id="8" name="Text 6"/>
-          <p:cNvSpPr txBox="1"/>
-          <p:nvPr/>
-        </p:nvSpPr>
-        <p:spPr>
-          <a:xfrm>
-            <a:off x="3840480" y="1417320"/>
-            <a:ext cx="6766560" cy="594360"/>
-          </a:xfrm>
-          <a:prstGeom prst="rect">
-            <a:avLst/>
-          </a:prstGeom>
-          <a:noFill/>
-          <a:ln/>
-        </p:spPr>
-        <p:txBody>
-          <a:bodyPr wrap="square" lIns="76200" tIns="76200" rIns="76200" bIns="76200" rtlCol="0" anchor="t"/>
-          <a:lstStyle/>
-          <a:p>
-            <a:pPr algn="l" indent="0" marL="0">
-              <a:lnSpc>
-                <a:spcPts val="3600"/>
-              </a:lnSpc>
-              <a:buNone/>
-            </a:pPr>
-            <a:r>
-              <a:rPr lang="en-US" sz="2800" b="1" dirty="0">
-                <a:solidFill>
-                  <a:srgbClr val="962B7C"/>
-                </a:solidFill>
-                <a:latin typeface="Alexandria" pitchFamily="34" charset="0"/>
-                <a:ea typeface="Alexandria" pitchFamily="34" charset="-122"/>
-                <a:cs typeface="Alexandria" pitchFamily="34" charset="-120"/>
-              </a:rPr>
-              <a:t>0–8 phút</a:t>
-            </a:r>
-            <a:endParaRPr lang="en-US" sz="2800" dirty="0"/>
-          </a:p>
-        </p:txBody>
-      </p:sp>
-      <p:sp>
-        <p:nvSpPr>
-          <p:cNvPr id="9" name="Text 0"/>
+          <p:cNvPr id="8" name="Text 0"/>
           <p:cNvSpPr/>
           <p:nvPr>
             <p:ph idx="100" type="title" hasCustomPrompt="1"/>
@@ -14923,8 +14850,8 @@
         </p:nvSpPr>
         <p:spPr>
           <a:xfrm>
-            <a:off x="3840480" y="2103120"/>
-            <a:ext cx="6766560" cy="2194560"/>
+            <a:off x="3840480" y="2240280"/>
+            <a:ext cx="6766560" cy="2377440"/>
           </a:xfrm>
           <a:prstGeom prst="rect">
             <a:avLst/>
@@ -14933,7 +14860,7 @@
           <a:ln/>
         </p:spPr>
         <p:txBody>
-          <a:bodyPr wrap="square" lIns="76200" tIns="76200" rIns="76200" bIns="76200" rtlCol="0" anchor="t"/>
+          <a:bodyPr wrap="square" lIns="76200" tIns="76200" rIns="76200" bIns="76200" rtlCol="0" anchor="ctr"/>
           <a:lstStyle/>
           <a:p>
             <a:pPr algn="l" indent="0" marL="0">
@@ -15122,7 +15049,7 @@
                 <a:ea typeface="Alexandria" pitchFamily="34" charset="-122"/>
                 <a:cs typeface="Alexandria" pitchFamily="34" charset="-120"/>
               </a:rPr>
-              <a:t>Chọn thiết kế: 30 giây bàn với bạn, rồi giơ tay</a:t>
+              <a:t>Chọn thiết kế: bàn với bạn, rồi giơ tay</a:t>
             </a:r>
             <a:endParaRPr lang="en-US" sz="3600" dirty="0"/>
           </a:p>
@@ -20075,7 +20002,7 @@
                 <a:ea typeface="Alexandria" pitchFamily="34" charset="-122"/>
                 <a:cs typeface="Alexandria" pitchFamily="34" charset="-120"/>
               </a:rPr>
-              <a:t>15'</a:t>
+              <a:t>Nghỉ</a:t>
             </a:r>
             <a:endParaRPr lang="en-US" sz="9600" dirty="0"/>
           </a:p>
@@ -20117,7 +20044,7 @@
                 <a:ea typeface="Alexandria" pitchFamily="34" charset="-122"/>
                 <a:cs typeface="Alexandria" pitchFamily="34" charset="-120"/>
               </a:rPr>
-              <a:t>Giải lao 15 phút</a:t>
+              <a:t>Giải lao</a:t>
             </a:r>
             <a:endParaRPr lang="en-US" sz="4800" dirty="0"/>
           </a:p>
@@ -20379,49 +20306,7 @@
       </p:sp>
       <p:sp>
         <p:nvSpPr>
-          <p:cNvPr id="8" name="Text 6"/>
-          <p:cNvSpPr txBox="1"/>
-          <p:nvPr/>
-        </p:nvSpPr>
-        <p:spPr>
-          <a:xfrm>
-            <a:off x="3840480" y="1417320"/>
-            <a:ext cx="6766560" cy="594360"/>
-          </a:xfrm>
-          <a:prstGeom prst="rect">
-            <a:avLst/>
-          </a:prstGeom>
-          <a:noFill/>
-          <a:ln/>
-        </p:spPr>
-        <p:txBody>
-          <a:bodyPr wrap="square" lIns="76200" tIns="76200" rIns="76200" bIns="76200" rtlCol="0" anchor="t"/>
-          <a:lstStyle/>
-          <a:p>
-            <a:pPr algn="l" indent="0" marL="0">
-              <a:lnSpc>
-                <a:spcPts val="3600"/>
-              </a:lnSpc>
-              <a:buNone/>
-            </a:pPr>
-            <a:r>
-              <a:rPr lang="en-US" sz="2800" b="1" dirty="0">
-                <a:solidFill>
-                  <a:srgbClr val="962B7C"/>
-                </a:solidFill>
-                <a:latin typeface="Alexandria" pitchFamily="34" charset="0"/>
-                <a:ea typeface="Alexandria" pitchFamily="34" charset="-122"/>
-                <a:cs typeface="Alexandria" pitchFamily="34" charset="-120"/>
-              </a:rPr>
-              <a:t>63–82 phút</a:t>
-            </a:r>
-            <a:endParaRPr lang="en-US" sz="2800" dirty="0"/>
-          </a:p>
-        </p:txBody>
-      </p:sp>
-      <p:sp>
-        <p:nvSpPr>
-          <p:cNvPr id="9" name="Text 0"/>
+          <p:cNvPr id="8" name="Text 0"/>
           <p:cNvSpPr/>
           <p:nvPr>
             <p:ph idx="100" type="title" hasCustomPrompt="1"/>
@@ -20429,8 +20314,8 @@
         </p:nvSpPr>
         <p:spPr>
           <a:xfrm>
-            <a:off x="3840480" y="2103120"/>
-            <a:ext cx="6766560" cy="2194560"/>
+            <a:off x="3840480" y="2240280"/>
+            <a:ext cx="6766560" cy="2377440"/>
           </a:xfrm>
           <a:prstGeom prst="rect">
             <a:avLst/>
@@ -20439,7 +20324,7 @@
           <a:ln/>
         </p:spPr>
         <p:txBody>
-          <a:bodyPr wrap="square" lIns="76200" tIns="76200" rIns="76200" bIns="76200" rtlCol="0" anchor="t"/>
+          <a:bodyPr wrap="square" lIns="76200" tIns="76200" rIns="76200" bIns="76200" rtlCol="0" anchor="ctr"/>
           <a:lstStyle/>
           <a:p>
             <a:pPr algn="l" indent="0" marL="0">
@@ -28804,49 +28689,7 @@
       </p:sp>
       <p:sp>
         <p:nvSpPr>
-          <p:cNvPr id="8" name="Text 6"/>
-          <p:cNvSpPr txBox="1"/>
-          <p:nvPr/>
-        </p:nvSpPr>
-        <p:spPr>
-          <a:xfrm>
-            <a:off x="3840480" y="1417320"/>
-            <a:ext cx="6766560" cy="594360"/>
-          </a:xfrm>
-          <a:prstGeom prst="rect">
-            <a:avLst/>
-          </a:prstGeom>
-          <a:noFill/>
-          <a:ln/>
-        </p:spPr>
-        <p:txBody>
-          <a:bodyPr wrap="square" lIns="76200" tIns="76200" rIns="76200" bIns="76200" rtlCol="0" anchor="t"/>
-          <a:lstStyle/>
-          <a:p>
-            <a:pPr algn="l" indent="0" marL="0">
-              <a:lnSpc>
-                <a:spcPts val="3600"/>
-              </a:lnSpc>
-              <a:buNone/>
-            </a:pPr>
-            <a:r>
-              <a:rPr lang="en-US" sz="2800" b="1" dirty="0">
-                <a:solidFill>
-                  <a:srgbClr val="962B7C"/>
-                </a:solidFill>
-                <a:latin typeface="Alexandria" pitchFamily="34" charset="0"/>
-                <a:ea typeface="Alexandria" pitchFamily="34" charset="-122"/>
-                <a:cs typeface="Alexandria" pitchFamily="34" charset="-120"/>
-              </a:rPr>
-              <a:t>82–100 phút</a:t>
-            </a:r>
-            <a:endParaRPr lang="en-US" sz="2800" dirty="0"/>
-          </a:p>
-        </p:txBody>
-      </p:sp>
-      <p:sp>
-        <p:nvSpPr>
-          <p:cNvPr id="9" name="Text 0"/>
+          <p:cNvPr id="8" name="Text 0"/>
           <p:cNvSpPr/>
           <p:nvPr>
             <p:ph idx="100" type="title" hasCustomPrompt="1"/>
@@ -28854,8 +28697,8 @@
         </p:nvSpPr>
         <p:spPr>
           <a:xfrm>
-            <a:off x="3840480" y="2103120"/>
-            <a:ext cx="6766560" cy="2194560"/>
+            <a:off x="3840480" y="2240280"/>
+            <a:ext cx="6766560" cy="2377440"/>
           </a:xfrm>
           <a:prstGeom prst="rect">
             <a:avLst/>
@@ -28864,7 +28707,7 @@
           <a:ln/>
         </p:spPr>
         <p:txBody>
-          <a:bodyPr wrap="square" lIns="76200" tIns="76200" rIns="76200" bIns="76200" rtlCol="0" anchor="t"/>
+          <a:bodyPr wrap="square" lIns="76200" tIns="76200" rIns="76200" bIns="76200" rtlCol="0" anchor="ctr"/>
           <a:lstStyle/>
           <a:p>
             <a:pPr algn="l" indent="0" marL="0">
@@ -39105,49 +38948,7 @@
       </p:sp>
       <p:sp>
         <p:nvSpPr>
-          <p:cNvPr id="8" name="Text 6"/>
-          <p:cNvSpPr txBox="1"/>
-          <p:nvPr/>
-        </p:nvSpPr>
-        <p:spPr>
-          <a:xfrm>
-            <a:off x="3840480" y="1417320"/>
-            <a:ext cx="6766560" cy="594360"/>
-          </a:xfrm>
-          <a:prstGeom prst="rect">
-            <a:avLst/>
-          </a:prstGeom>
-          <a:noFill/>
-          <a:ln/>
-        </p:spPr>
-        <p:txBody>
-          <a:bodyPr wrap="square" lIns="76200" tIns="76200" rIns="76200" bIns="76200" rtlCol="0" anchor="t"/>
-          <a:lstStyle/>
-          <a:p>
-            <a:pPr algn="l" indent="0" marL="0">
-              <a:lnSpc>
-                <a:spcPts val="3600"/>
-              </a:lnSpc>
-              <a:buNone/>
-            </a:pPr>
-            <a:r>
-              <a:rPr lang="en-US" sz="2800" b="1" dirty="0">
-                <a:solidFill>
-                  <a:srgbClr val="962B7C"/>
-                </a:solidFill>
-                <a:latin typeface="Alexandria" pitchFamily="34" charset="0"/>
-                <a:ea typeface="Alexandria" pitchFamily="34" charset="-122"/>
-                <a:cs typeface="Alexandria" pitchFamily="34" charset="-120"/>
-              </a:rPr>
-              <a:t>100–145 phút</a:t>
-            </a:r>
-            <a:endParaRPr lang="en-US" sz="2800" dirty="0"/>
-          </a:p>
-        </p:txBody>
-      </p:sp>
-      <p:sp>
-        <p:nvSpPr>
-          <p:cNvPr id="9" name="Text 0"/>
+          <p:cNvPr id="8" name="Text 0"/>
           <p:cNvSpPr/>
           <p:nvPr>
             <p:ph idx="100" type="title" hasCustomPrompt="1"/>
@@ -39155,8 +38956,8 @@
         </p:nvSpPr>
         <p:spPr>
           <a:xfrm>
-            <a:off x="3840480" y="2103120"/>
-            <a:ext cx="6766560" cy="2194560"/>
+            <a:off x="3840480" y="2240280"/>
+            <a:ext cx="6766560" cy="2377440"/>
           </a:xfrm>
           <a:prstGeom prst="rect">
             <a:avLst/>
@@ -39165,7 +38966,7 @@
           <a:ln/>
         </p:spPr>
         <p:txBody>
-          <a:bodyPr wrap="square" lIns="76200" tIns="76200" rIns="76200" bIns="76200" rtlCol="0" anchor="t"/>
+          <a:bodyPr wrap="square" lIns="76200" tIns="76200" rIns="76200" bIns="76200" rtlCol="0" anchor="ctr"/>
           <a:lstStyle/>
           <a:p>
             <a:pPr algn="l" indent="0" marL="0">
@@ -39400,49 +39201,7 @@
       </p:sp>
       <p:sp>
         <p:nvSpPr>
-          <p:cNvPr id="8" name="Text 6"/>
-          <p:cNvSpPr txBox="1"/>
-          <p:nvPr/>
-        </p:nvSpPr>
-        <p:spPr>
-          <a:xfrm>
-            <a:off x="3840480" y="1417320"/>
-            <a:ext cx="6766560" cy="594360"/>
-          </a:xfrm>
-          <a:prstGeom prst="rect">
-            <a:avLst/>
-          </a:prstGeom>
-          <a:noFill/>
-          <a:ln/>
-        </p:spPr>
-        <p:txBody>
-          <a:bodyPr wrap="square" lIns="76200" tIns="76200" rIns="76200" bIns="76200" rtlCol="0" anchor="t"/>
-          <a:lstStyle/>
-          <a:p>
-            <a:pPr algn="l" indent="0" marL="0">
-              <a:lnSpc>
-                <a:spcPts val="3600"/>
-              </a:lnSpc>
-              <a:buNone/>
-            </a:pPr>
-            <a:r>
-              <a:rPr lang="en-US" sz="2800" b="1" dirty="0">
-                <a:solidFill>
-                  <a:srgbClr val="962B7C"/>
-                </a:solidFill>
-                <a:latin typeface="Alexandria" pitchFamily="34" charset="0"/>
-                <a:ea typeface="Alexandria" pitchFamily="34" charset="-122"/>
-                <a:cs typeface="Alexandria" pitchFamily="34" charset="-120"/>
-              </a:rPr>
-              <a:t>8–40 phút</a:t>
-            </a:r>
-            <a:endParaRPr lang="en-US" sz="2800" dirty="0"/>
-          </a:p>
-        </p:txBody>
-      </p:sp>
-      <p:sp>
-        <p:nvSpPr>
-          <p:cNvPr id="9" name="Text 0"/>
+          <p:cNvPr id="8" name="Text 0"/>
           <p:cNvSpPr/>
           <p:nvPr>
             <p:ph idx="100" type="title" hasCustomPrompt="1"/>
@@ -39450,8 +39209,8 @@
         </p:nvSpPr>
         <p:spPr>
           <a:xfrm>
-            <a:off x="3840480" y="2103120"/>
-            <a:ext cx="6766560" cy="2194560"/>
+            <a:off x="3840480" y="2240280"/>
+            <a:ext cx="6766560" cy="2377440"/>
           </a:xfrm>
           <a:prstGeom prst="rect">
             <a:avLst/>
@@ -39460,7 +39219,7 @@
           <a:ln/>
         </p:spPr>
         <p:txBody>
-          <a:bodyPr wrap="square" lIns="76200" tIns="76200" rIns="76200" bIns="76200" rtlCol="0" anchor="t"/>
+          <a:bodyPr wrap="square" lIns="76200" tIns="76200" rIns="76200" bIns="76200" rtlCol="0" anchor="ctr"/>
           <a:lstStyle/>
           <a:p>
             <a:pPr algn="l" indent="0" marL="0">
@@ -39649,7 +39408,7 @@
                 <a:ea typeface="Alexandria" pitchFamily="34" charset="-122"/>
                 <a:cs typeface="Alexandria" pitchFamily="34" charset="-120"/>
               </a:rPr>
-              <a:t>Từ vấn đề đến đề cương (45'): mỗi nhóm viết bản nháp 4.3.1, 4.3.5, 4.3.7</a:t>
+              <a:t>Từ vấn đề đến đề cương: mỗi nhóm viết bản nháp 4.3.1, 4.3.5, 4.3.7</a:t>
             </a:r>
             <a:endParaRPr lang="en-US" sz="3400" dirty="0"/>
           </a:p>
@@ -39686,7 +39445,7 @@
         <p:spPr>
           <a:xfrm>
             <a:off x="640080" y="1828800"/>
-            <a:ext cx="1280160" cy="548640"/>
+            <a:ext cx="731520" cy="548640"/>
           </a:xfrm>
           <a:prstGeom prst="roundRect">
             <a:avLst>
@@ -39708,7 +39467,7 @@
         <p:spPr>
           <a:xfrm>
             <a:off x="640080" y="1828800"/>
-            <a:ext cx="1280160" cy="548640"/>
+            <a:ext cx="731520" cy="548640"/>
           </a:xfrm>
           <a:prstGeom prst="rect">
             <a:avLst/>
@@ -39735,7 +39494,7 @@
                 <a:ea typeface="Alexandria" pitchFamily="34" charset="-122"/>
                 <a:cs typeface="Alexandria" pitchFamily="34" charset="-120"/>
               </a:rPr>
-              <a:t>8'</a:t>
+              <a:t>1</a:t>
             </a:r>
             <a:endParaRPr lang="en-US" sz="2400" dirty="0"/>
           </a:p>
@@ -39749,8 +39508,8 @@
         </p:nvSpPr>
         <p:spPr>
           <a:xfrm>
-            <a:off x="2103120" y="1783080"/>
-            <a:ext cx="9372600" cy="640080"/>
+            <a:off x="1554480" y="1783080"/>
+            <a:ext cx="9921240" cy="640080"/>
           </a:xfrm>
           <a:prstGeom prst="rect">
             <a:avLst/>
@@ -39814,7 +39573,7 @@
         <p:spPr>
           <a:xfrm>
             <a:off x="640080" y="2606040"/>
-            <a:ext cx="1280160" cy="548640"/>
+            <a:ext cx="731520" cy="548640"/>
           </a:xfrm>
           <a:prstGeom prst="roundRect">
             <a:avLst>
@@ -39836,7 +39595,7 @@
         <p:spPr>
           <a:xfrm>
             <a:off x="640080" y="2606040"/>
-            <a:ext cx="1280160" cy="548640"/>
+            <a:ext cx="731520" cy="548640"/>
           </a:xfrm>
           <a:prstGeom prst="rect">
             <a:avLst/>
@@ -39863,7 +39622,7 @@
                 <a:ea typeface="Alexandria" pitchFamily="34" charset="-122"/>
                 <a:cs typeface="Alexandria" pitchFamily="34" charset="-120"/>
               </a:rPr>
-              <a:t>12'</a:t>
+              <a:t>2</a:t>
             </a:r>
             <a:endParaRPr lang="en-US" sz="2400" dirty="0"/>
           </a:p>
@@ -39877,8 +39636,8 @@
         </p:nvSpPr>
         <p:spPr>
           <a:xfrm>
-            <a:off x="2103120" y="2560320"/>
-            <a:ext cx="9372600" cy="640080"/>
+            <a:off x="1554480" y="2560320"/>
+            <a:ext cx="9921240" cy="640080"/>
           </a:xfrm>
           <a:prstGeom prst="rect">
             <a:avLst/>
@@ -39942,7 +39701,7 @@
         <p:spPr>
           <a:xfrm>
             <a:off x="640080" y="3383280"/>
-            <a:ext cx="1280160" cy="548640"/>
+            <a:ext cx="731520" cy="548640"/>
           </a:xfrm>
           <a:prstGeom prst="roundRect">
             <a:avLst>
@@ -39964,7 +39723,7 @@
         <p:spPr>
           <a:xfrm>
             <a:off x="640080" y="3383280"/>
-            <a:ext cx="1280160" cy="548640"/>
+            <a:ext cx="731520" cy="548640"/>
           </a:xfrm>
           <a:prstGeom prst="rect">
             <a:avLst/>
@@ -39991,7 +39750,7 @@
                 <a:ea typeface="Alexandria" pitchFamily="34" charset="-122"/>
                 <a:cs typeface="Alexandria" pitchFamily="34" charset="-120"/>
               </a:rPr>
-              <a:t>5'</a:t>
+              <a:t>3</a:t>
             </a:r>
             <a:endParaRPr lang="en-US" sz="2400" dirty="0"/>
           </a:p>
@@ -40005,8 +39764,8 @@
         </p:nvSpPr>
         <p:spPr>
           <a:xfrm>
-            <a:off x="2103120" y="3337560"/>
-            <a:ext cx="9372600" cy="640080"/>
+            <a:off x="1554480" y="3337560"/>
+            <a:ext cx="9921240" cy="640080"/>
           </a:xfrm>
           <a:prstGeom prst="rect">
             <a:avLst/>
@@ -40070,7 +39829,7 @@
         <p:spPr>
           <a:xfrm>
             <a:off x="640080" y="4160520"/>
-            <a:ext cx="1280160" cy="548640"/>
+            <a:ext cx="731520" cy="548640"/>
           </a:xfrm>
           <a:prstGeom prst="roundRect">
             <a:avLst>
@@ -40092,7 +39851,7 @@
         <p:spPr>
           <a:xfrm>
             <a:off x="640080" y="4160520"/>
-            <a:ext cx="1280160" cy="548640"/>
+            <a:ext cx="731520" cy="548640"/>
           </a:xfrm>
           <a:prstGeom prst="rect">
             <a:avLst/>
@@ -40119,7 +39878,7 @@
                 <a:ea typeface="Alexandria" pitchFamily="34" charset="-122"/>
                 <a:cs typeface="Alexandria" pitchFamily="34" charset="-120"/>
               </a:rPr>
-              <a:t>13'</a:t>
+              <a:t>4</a:t>
             </a:r>
             <a:endParaRPr lang="en-US" sz="2400" dirty="0"/>
           </a:p>
@@ -40133,8 +39892,8 @@
         </p:nvSpPr>
         <p:spPr>
           <a:xfrm>
-            <a:off x="2103120" y="4114800"/>
-            <a:ext cx="9372600" cy="640080"/>
+            <a:off x="1554480" y="4114800"/>
+            <a:ext cx="9921240" cy="640080"/>
           </a:xfrm>
           <a:prstGeom prst="rect">
             <a:avLst/>
@@ -40198,7 +39957,7 @@
         <p:spPr>
           <a:xfrm>
             <a:off x="640080" y="4937760"/>
-            <a:ext cx="1280160" cy="548640"/>
+            <a:ext cx="731520" cy="548640"/>
           </a:xfrm>
           <a:prstGeom prst="roundRect">
             <a:avLst>
@@ -40220,7 +39979,7 @@
         <p:spPr>
           <a:xfrm>
             <a:off x="640080" y="4937760"/>
-            <a:ext cx="1280160" cy="548640"/>
+            <a:ext cx="731520" cy="548640"/>
           </a:xfrm>
           <a:prstGeom prst="rect">
             <a:avLst/>
@@ -40247,7 +40006,7 @@
                 <a:ea typeface="Alexandria" pitchFamily="34" charset="-122"/>
                 <a:cs typeface="Alexandria" pitchFamily="34" charset="-120"/>
               </a:rPr>
-              <a:t>7'</a:t>
+              <a:t>5</a:t>
             </a:r>
             <a:endParaRPr lang="en-US" sz="2400" dirty="0"/>
           </a:p>
@@ -40261,8 +40020,8 @@
         </p:nvSpPr>
         <p:spPr>
           <a:xfrm>
-            <a:off x="2103120" y="4892040"/>
-            <a:ext cx="9372600" cy="640080"/>
+            <a:off x="1554480" y="4892040"/>
+            <a:ext cx="9921240" cy="640080"/>
           </a:xfrm>
           <a:prstGeom prst="rect">
             <a:avLst/>
@@ -40289,7 +40048,7 @@
                 <a:ea typeface="Alexandria" pitchFamily="34" charset="-122"/>
                 <a:cs typeface="Alexandria" pitchFamily="34" charset="-120"/>
               </a:rPr>
-              <a:t>3–4 nhóm chia sẻ, mỗi nhóm 1 phút</a:t>
+              <a:t>3–4 nhóm chia sẻ</a:t>
             </a:r>
             <a:endParaRPr lang="en-US" sz="2800" dirty="0"/>
           </a:p>
@@ -40509,49 +40268,7 @@
       </p:sp>
       <p:sp>
         <p:nvSpPr>
-          <p:cNvPr id="8" name="Text 6"/>
-          <p:cNvSpPr txBox="1"/>
-          <p:nvPr/>
-        </p:nvSpPr>
-        <p:spPr>
-          <a:xfrm>
-            <a:off x="3840480" y="1417320"/>
-            <a:ext cx="6766560" cy="594360"/>
-          </a:xfrm>
-          <a:prstGeom prst="rect">
-            <a:avLst/>
-          </a:prstGeom>
-          <a:noFill/>
-          <a:ln/>
-        </p:spPr>
-        <p:txBody>
-          <a:bodyPr wrap="square" lIns="76200" tIns="76200" rIns="76200" bIns="76200" rtlCol="0" anchor="t"/>
-          <a:lstStyle/>
-          <a:p>
-            <a:pPr algn="l" indent="0" marL="0">
-              <a:lnSpc>
-                <a:spcPts val="3600"/>
-              </a:lnSpc>
-              <a:buNone/>
-            </a:pPr>
-            <a:r>
-              <a:rPr lang="en-US" sz="2800" b="1" dirty="0">
-                <a:solidFill>
-                  <a:srgbClr val="962B7C"/>
-                </a:solidFill>
-                <a:latin typeface="Alexandria" pitchFamily="34" charset="0"/>
-                <a:ea typeface="Alexandria" pitchFamily="34" charset="-122"/>
-                <a:cs typeface="Alexandria" pitchFamily="34" charset="-120"/>
-              </a:rPr>
-              <a:t>145–150 phút</a:t>
-            </a:r>
-            <a:endParaRPr lang="en-US" sz="2800" dirty="0"/>
-          </a:p>
-        </p:txBody>
-      </p:sp>
-      <p:sp>
-        <p:nvSpPr>
-          <p:cNvPr id="9" name="Text 0"/>
+          <p:cNvPr id="8" name="Text 0"/>
           <p:cNvSpPr/>
           <p:nvPr>
             <p:ph idx="100" type="title" hasCustomPrompt="1"/>
@@ -40559,8 +40276,8 @@
         </p:nvSpPr>
         <p:spPr>
           <a:xfrm>
-            <a:off x="3840480" y="2103120"/>
-            <a:ext cx="6766560" cy="2194560"/>
+            <a:off x="3840480" y="2240280"/>
+            <a:ext cx="6766560" cy="2377440"/>
           </a:xfrm>
           <a:prstGeom prst="rect">
             <a:avLst/>
@@ -40569,7 +40286,7 @@
           <a:ln/>
         </p:spPr>
         <p:txBody>
-          <a:bodyPr wrap="square" lIns="76200" tIns="76200" rIns="76200" bIns="76200" rtlCol="0" anchor="t"/>
+          <a:bodyPr wrap="square" lIns="76200" tIns="76200" rIns="76200" bIns="76200" rtlCol="0" anchor="ctr"/>
           <a:lstStyle/>
           <a:p>
             <a:pPr algn="l" indent="0" marL="0">
